--- a/V2授课PPT/W18-第19次课-RAG知识库问答（上）：.pptx
+++ b/V2授课PPT/W18-第19次课-RAG知识库问答（上）：.pptx
@@ -43,6 +43,8 @@
     <p:sldId id="319" r:id="rId71"/>
     <p:sldId id="367" r:id="rId66"/>
     <p:sldId id="368" r:id="rId64"/>
+    <p:sldId id="369" r:id="rId62"/>
+    <p:sldId id="370" r:id="rId73"/>
     <p:sldId id="366" r:id="rId67"/>
     <p:sldId id="320" r:id="rId72"/>
     <p:sldId id="322" r:id="rId74"/>
@@ -8195,7 +8197,7 @@
                 </a:solidFill>
                 <a:latin typeface="微软雅黑"/>
               </a:rPr>
-              <a:t>10 / 64</a:t>
+              <a:t>10 / 66</a:t>
             </a:r>
           </a:p>
         </p:txBody>
@@ -9050,7 +9052,7 @@
                 </a:solidFill>
                 <a:latin typeface="微软雅黑"/>
               </a:rPr>
-              <a:t>11 / 64</a:t>
+              <a:t>11 / 66</a:t>
             </a:r>
           </a:p>
         </p:txBody>
@@ -9842,7 +9844,7 @@
                 </a:solidFill>
                 <a:latin typeface="微软雅黑"/>
               </a:rPr>
-              <a:t>12 / 64</a:t>
+              <a:t>12 / 66</a:t>
             </a:r>
           </a:p>
         </p:txBody>
@@ -10328,7 +10330,7 @@
                 </a:solidFill>
                 <a:latin typeface="微软雅黑"/>
               </a:rPr>
-              <a:t>13 / 64</a:t>
+              <a:t>13 / 66</a:t>
             </a:r>
           </a:p>
         </p:txBody>
@@ -11399,7 +11401,7 @@
                 </a:solidFill>
                 <a:latin typeface="微软雅黑"/>
               </a:rPr>
-              <a:t>14 / 64</a:t>
+              <a:t>14 / 66</a:t>
             </a:r>
           </a:p>
         </p:txBody>
@@ -12105,7 +12107,7 @@
                 </a:solidFill>
                 <a:latin typeface="微软雅黑"/>
               </a:rPr>
-              <a:t>15 / 64</a:t>
+              <a:t>15 / 66</a:t>
             </a:r>
           </a:p>
         </p:txBody>
@@ -12811,7 +12813,7 @@
                 </a:solidFill>
                 <a:latin typeface="微软雅黑"/>
               </a:rPr>
-              <a:t>16 / 64</a:t>
+              <a:t>16 / 66</a:t>
             </a:r>
           </a:p>
         </p:txBody>
@@ -13517,7 +13519,7 @@
                 </a:solidFill>
                 <a:latin typeface="微软雅黑"/>
               </a:rPr>
-              <a:t>17 / 64</a:t>
+              <a:t>17 / 66</a:t>
             </a:r>
           </a:p>
         </p:txBody>
@@ -14223,7 +14225,7 @@
                 </a:solidFill>
                 <a:latin typeface="微软雅黑"/>
               </a:rPr>
-              <a:t>18 / 64</a:t>
+              <a:t>18 / 66</a:t>
             </a:r>
           </a:p>
         </p:txBody>
@@ -14697,7 +14699,7 @@
                 </a:solidFill>
                 <a:latin typeface="微软雅黑"/>
               </a:rPr>
-              <a:t>19 / 64</a:t>
+              <a:t>19 / 66</a:t>
             </a:r>
           </a:p>
         </p:txBody>
@@ -16425,7 +16427,7 @@
                 </a:solidFill>
                 <a:latin typeface="微软雅黑"/>
               </a:rPr>
-              <a:t>2 / 64</a:t>
+              <a:t>2 / 66</a:t>
             </a:r>
           </a:p>
         </p:txBody>
@@ -17131,7 +17133,7 @@
                 </a:solidFill>
                 <a:latin typeface="微软雅黑"/>
               </a:rPr>
-              <a:t>20 / 64</a:t>
+              <a:t>20 / 66</a:t>
             </a:r>
           </a:p>
         </p:txBody>
@@ -17986,7 +17988,7 @@
                 </a:solidFill>
                 <a:latin typeface="微软雅黑"/>
               </a:rPr>
-              <a:t>21 / 64</a:t>
+              <a:t>21 / 66</a:t>
             </a:r>
           </a:p>
         </p:txBody>
@@ -18956,7 +18958,7 @@
                 </a:solidFill>
                 <a:latin typeface="微软雅黑"/>
               </a:rPr>
-              <a:t>22 / 64</a:t>
+              <a:t>22 / 66</a:t>
             </a:r>
           </a:p>
         </p:txBody>
@@ -19926,7 +19928,7 @@
                 </a:solidFill>
                 <a:latin typeface="微软雅黑"/>
               </a:rPr>
-              <a:t>23 / 64</a:t>
+              <a:t>23 / 66</a:t>
             </a:r>
           </a:p>
         </p:txBody>
@@ -20462,7 +20464,7 @@
                 </a:solidFill>
                 <a:latin typeface="微软雅黑"/>
               </a:rPr>
-              <a:t>24 / 64</a:t>
+              <a:t>24 / 66</a:t>
             </a:r>
           </a:p>
         </p:txBody>
@@ -21432,7 +21434,7 @@
                 </a:solidFill>
                 <a:latin typeface="微软雅黑"/>
               </a:rPr>
-              <a:t>25 / 64</a:t>
+              <a:t>25 / 66</a:t>
             </a:r>
           </a:p>
         </p:txBody>
@@ -22402,7 +22404,7 @@
                 </a:solidFill>
                 <a:latin typeface="微软雅黑"/>
               </a:rPr>
-              <a:t>26 / 64</a:t>
+              <a:t>26 / 66</a:t>
             </a:r>
           </a:p>
         </p:txBody>
@@ -23372,7 +23374,7 @@
                 </a:solidFill>
                 <a:latin typeface="微软雅黑"/>
               </a:rPr>
-              <a:t>27 / 64</a:t>
+              <a:t>27 / 66</a:t>
             </a:r>
           </a:p>
         </p:txBody>
@@ -24342,7 +24344,7 @@
                 </a:solidFill>
                 <a:latin typeface="微软雅黑"/>
               </a:rPr>
-              <a:t>28 / 64</a:t>
+              <a:t>28 / 66</a:t>
             </a:r>
           </a:p>
         </p:txBody>
@@ -25314,7 +25316,7 @@
                 </a:solidFill>
                 <a:latin typeface="微软雅黑"/>
               </a:rPr>
-              <a:t>29 / 64</a:t>
+              <a:t>29 / 66</a:t>
             </a:r>
           </a:p>
         </p:txBody>
@@ -26106,7 +26108,7 @@
                 </a:solidFill>
                 <a:latin typeface="微软雅黑"/>
               </a:rPr>
-              <a:t>3 / 64</a:t>
+              <a:t>3 / 66</a:t>
             </a:r>
           </a:p>
         </p:txBody>
@@ -26550,7 +26552,7 @@
                 </a:solidFill>
                 <a:latin typeface="微软雅黑"/>
               </a:rPr>
-              <a:t>30 / 64</a:t>
+              <a:t>30 / 66</a:t>
             </a:r>
           </a:p>
         </p:txBody>
@@ -26975,7 +26977,7 @@
                 </a:solidFill>
                 <a:latin typeface="微软雅黑"/>
               </a:rPr>
-              <a:t>31 / 64</a:t>
+              <a:t>31 / 66</a:t>
             </a:r>
           </a:p>
         </p:txBody>
@@ -28019,7 +28021,7 @@
                 </a:solidFill>
                 <a:latin typeface="微软雅黑"/>
               </a:rPr>
-              <a:t>32 / 64</a:t>
+              <a:t>32 / 66</a:t>
             </a:r>
           </a:p>
         </p:txBody>
@@ -28874,7 +28876,7 @@
                 </a:solidFill>
                 <a:latin typeface="微软雅黑"/>
               </a:rPr>
-              <a:t>33 / 64</a:t>
+              <a:t>33 / 66</a:t>
             </a:r>
           </a:p>
         </p:txBody>
@@ -30942,7 +30944,7 @@
                 </a:solidFill>
                 <a:latin typeface="微软雅黑"/>
               </a:rPr>
-              <a:t>34 / 64</a:t>
+              <a:t>34 / 66</a:t>
             </a:r>
           </a:p>
         </p:txBody>
@@ -31734,7 +31736,7 @@
                 </a:solidFill>
                 <a:latin typeface="微软雅黑"/>
               </a:rPr>
-              <a:t>35 / 64</a:t>
+              <a:t>35 / 66</a:t>
             </a:r>
           </a:p>
         </p:txBody>
@@ -32405,7 +32407,7 @@
                 </a:solidFill>
                 <a:latin typeface="微软雅黑"/>
               </a:rPr>
-              <a:t>36 / 64</a:t>
+              <a:t>36 / 66</a:t>
             </a:r>
           </a:p>
         </p:txBody>
@@ -32681,7 +32683,7 @@
                 </a:solidFill>
                 <a:latin typeface="微软雅黑"/>
               </a:rPr>
-              <a:t>37 / 64</a:t>
+              <a:t>37 / 66</a:t>
             </a:r>
           </a:p>
         </p:txBody>
@@ -32853,142 +32855,87 @@
                   <a:srgbClr val="0545E8"/>
                 </a:solidFill>
               </a:rPr>
-              <a:t>① 参考实现真实运行输出（本工单完成态）</a:t>
-            </a:r>
-          </a:p>
-          <a:p>
-            <a:pPr algn="l">
-              <a:spcBef>
-                <a:spcPts val="100"/>
-              </a:spcBef>
-            </a:pPr>
-            <a:r>
-              <a:rPr sz="1000" b="0">
-                <a:solidFill>
-                  <a:srgbClr val="010328"/>
-                </a:solidFill>
-              </a:rPr>
-              <a:t>=== 工单 M4-2 RAG 知识库问答 · 完成态 ===</a:t>
-            </a:r>
-          </a:p>
-          <a:p>
-            <a:pPr algn="l">
-              <a:spcBef>
-                <a:spcPts val="100"/>
-              </a:spcBef>
-            </a:pPr>
-            <a:r>
-              <a:rPr sz="1000" b="0">
-                <a:solidFill>
-                  <a:srgbClr val="010328"/>
-                </a:solidFill>
-              </a:rPr>
-              <a:t>知识库: data/knowledge_base.json  共 20 条（设备运维规范×7/故障排查指南×7/工艺参数标准×…</a:t>
-            </a:r>
-          </a:p>
-          <a:p>
-            <a:pPr algn="l">
-              <a:spcBef>
-                <a:spcPts val="100"/>
-              </a:spcBef>
-            </a:pPr>
-            <a:r>
-              <a:rPr sz="1000" b="0">
-                <a:solidFill>
-                  <a:srgbClr val="010328"/>
-                </a:solidFill>
-              </a:rPr>
-              <a:t>Q: 泵振动超标要看哪个标准</a:t>
-            </a:r>
-          </a:p>
-          <a:p>
-            <a:pPr algn="l">
-              <a:spcBef>
-                <a:spcPts val="100"/>
-              </a:spcBef>
-            </a:pPr>
-            <a:r>
-              <a:rPr sz="1000" b="0">
-                <a:solidFill>
-                  <a:srgbClr val="010328"/>
-                </a:solidFill>
-              </a:rPr>
-              <a:t>A: 依据知识库:</a:t>
-            </a:r>
-          </a:p>
-          <a:p>
-            <a:pPr algn="l">
-              <a:spcBef>
-                <a:spcPts val="100"/>
-              </a:spcBef>
-            </a:pPr>
-            <a:r>
-              <a:rPr sz="1000" b="0">
-                <a:solidFill>
-                  <a:srgbClr val="010328"/>
-                </a:solidFill>
-              </a:rPr>
-              <a:t>  - [设备运维规范] 泵类设备振动速度有效值超过4.5mm/s应列入重点关注，超过7.1mm/s必须停机检查。</a:t>
-            </a:r>
-          </a:p>
-          <a:p>
-            <a:pPr algn="l">
-              <a:spcBef>
-                <a:spcPts val="100"/>
-              </a:spcBef>
-            </a:pPr>
-            <a:r>
-              <a:rPr sz="1000" b="0">
-                <a:solidFill>
-                  <a:srgbClr val="010328"/>
-                </a:solidFill>
-              </a:rPr>
-              <a:t>  - [设备运维规范] 风机轴承振动加速度包络值突增30%以上时，应安排停机检查滚道点蚀与保持架磨损。</a:t>
-            </a:r>
-          </a:p>
-          <a:p>
-            <a:pPr algn="l">
-              <a:spcBef>
-                <a:spcPts val="100"/>
-              </a:spcBef>
-            </a:pPr>
-            <a:r>
-              <a:rPr sz="1000" b="0">
-                <a:solidFill>
-                  <a:srgbClr val="010328"/>
-                </a:solidFill>
-              </a:rPr>
-              <a:t>  → 建议：按上述条款执行并回填工单。</a:t>
-            </a:r>
-          </a:p>
-          <a:p>
-            <a:pPr algn="l">
-              <a:spcBef>
-                <a:spcPts val="100"/>
-              </a:spcBef>
-            </a:pPr>
-            <a:r>
-              <a:rPr sz="1000" b="0">
-                <a:solidFill>
-                  <a:srgbClr val="010328"/>
-                </a:solidFill>
-              </a:rPr>
-              <a:t>Q: 电机电流高但转速正常</a:t>
-            </a:r>
-          </a:p>
-          <a:p>
-            <a:pPr algn="l">
-              <a:spcBef>
-                <a:spcPts val="100"/>
-              </a:spcBef>
-            </a:pPr>
-            <a:r>
-              <a:rPr sz="1000" b="0">
-                <a:solidFill>
-                  <a:srgbClr val="010328"/>
-                </a:solidFill>
-              </a:rPr>
-              <a:t>升级解: ChromaDB 向量检索（教师参考/rag_chroma_demo.py）——语义相近但字面不重合的查询也能命中。</a:t>
+              <a:t>① 本次真跑实测输出（逐字取自 output/report.txt）</a:t>
+            </a:r>
+          </a:p>
+          <a:p>
+            <a:r>
+              <a:rPr sz="1400" b="1">
+                <a:solidFill>
+                  <a:srgbClr val="0545E8"/>
+                </a:solidFill>
+              </a:rPr>
+              <a:t>实测达成档位: 优(A) ｜ 幻觉案例实测 3 条 ｜ 检索命中率（RRF 融合通道 recall@3）100.0% ｜ 引用覆盖率 100% ｜ 可溯源比例 100% ｜ 融合说明 2 行 ｜ 决策记录完整=是 ｜ 代码规范率实测 95.8%</a:t>
+            </a:r>
+          </a:p>
+          <a:p>
+            <a:r>
+              <a:rPr sz="1400" b="1">
+                <a:solidFill>
+                  <a:srgbClr val="0545E8"/>
+                </a:solidFill>
+              </a:rPr>
+              <a:t>及格(D)    规范率门槛≥70% [达标] ｜ 功能OK ｜ 幻觉案例≥2条；代码规范率≥70%</a:t>
+            </a:r>
+          </a:p>
+          <a:p>
+            <a:r>
+              <a:rPr sz="1400" b="1">
+                <a:solidFill>
+                  <a:srgbClr val="0545E8"/>
+                </a:solidFill>
+              </a:rPr>
+              <a:t>良好(C)    功能OK ｜ 检索≥80%有引用</a:t>
+            </a:r>
+          </a:p>
+          <a:p>
+            <a:r>
+              <a:rPr sz="1400" b="1">
+                <a:solidFill>
+                  <a:srgbClr val="0545E8"/>
+                </a:solidFill>
+              </a:rPr>
+              <a:t>优秀(B)    功能OK ｜ 检索≥85%可溯源；决策记录完整</a:t>
+            </a:r>
+          </a:p>
+          <a:p>
+            <a:r>
+              <a:rPr sz="1400" b="1">
+                <a:solidFill>
+                  <a:srgbClr val="0545E8"/>
+                </a:solidFill>
+              </a:rPr>
+              <a:t>优(A)     功能OK ｜ 检索≥90%加融合说明</a:t>
+            </a:r>
+          </a:p>
+          <a:p>
+            <a:r>
+              <a:rPr sz="1400" b="1">
+                <a:solidFill>
+                  <a:srgbClr val="0545E8"/>
+                </a:solidFill>
+              </a:rPr>
+              <a:t>人工答辩项 1 条，教师答辩时确认：企业元验收栏：功能可用□ 参数留痕□ 数据可信□（师傅签字）</a:t>
+            </a:r>
+          </a:p>
+          <a:p>
+            <a:r>
+              <a:rPr sz="1400" b="1">
+                <a:solidFill>
+                  <a:srgbClr val="0545E8"/>
+                </a:solidFill>
+              </a:rPr>
+              <a:t>RAG 底线='有据可查+诚实拒答'；查无依据的查询用于发现知识库盲区</a:t>
+            </a:r>
+          </a:p>
+          <a:p>
+            <a:r>
+              <a:rPr sz="1400" b="1">
+                <a:solidFill>
+                  <a:srgbClr val="0545E8"/>
+                </a:solidFill>
+              </a:rPr>
+              <a:t>检索双解：关键词精确匹配型号/编码，jieba+TF-IDF 语义重合描述类查询，RRF 融合两路互补（工单B03）</a:t>
             </a:r>
           </a:p>
         </p:txBody>
@@ -33362,7 +33309,7 @@
                 </a:solidFill>
                 <a:latin typeface="微软雅黑"/>
               </a:rPr>
-              <a:t>38 / 64</a:t>
+              <a:t>38 / 66</a:t>
             </a:r>
           </a:p>
         </p:txBody>
@@ -33977,7 +33924,7 @@
                 </a:solidFill>
                 <a:latin typeface="微软雅黑"/>
               </a:rPr>
-              <a:t>39 / 64</a:t>
+              <a:t>41 / 66</a:t>
             </a:r>
           </a:p>
         </p:txBody>
@@ -35237,7 +35184,7 @@
                 </a:solidFill>
                 <a:latin typeface="微软雅黑"/>
               </a:rPr>
-              <a:t>4 / 64</a:t>
+              <a:t>4 / 66</a:t>
             </a:r>
           </a:p>
         </p:txBody>
@@ -36001,7 +35948,7 @@
         <p:spPr>
           <a:xfrm>
             <a:off x="940000" y="5720000"/>
-            <a:ext cx="10500000" cy="520000"/>
+            <a:ext cx="10500000" cy="731520"/>
           </a:xfrm>
           <a:prstGeom prst="rect">
             <a:avLst/>
@@ -36023,13 +35970,24 @@
               </a:spcAft>
             </a:pPr>
             <a:r>
-              <a:rPr sz="1350" b="1">
+              <a:rPr sz="1050" b="1">
                 <a:solidFill>
                   <a:srgbClr val="010328"/>
                 </a:solidFill>
                 <a:latin typeface="微软雅黑"/>
               </a:rPr>
               <a:t>✔ 达标标准: 幻觉案例≥2条</a:t>
+            </a:r>
+          </a:p>
+          <a:p>
+            <a:r>
+              <a:rPr sz="1050" b="1">
+                <a:solidFill>
+                  <a:srgbClr val="010328"/>
+                </a:solidFill>
+                <a:latin typeface="微软雅黑"/>
+              </a:rPr>
+              <a:t>✓ 本次实测达标 ｜ 规范率门槛≥70% [达标] ｜ 功能OK</a:t>
             </a:r>
           </a:p>
         </p:txBody>
@@ -36157,7 +36115,7 @@
                 </a:solidFill>
                 <a:latin typeface="微软雅黑"/>
               </a:rPr>
-              <a:t>40 / 64</a:t>
+              <a:t>42 / 66</a:t>
             </a:r>
           </a:p>
         </p:txBody>
@@ -36921,7 +36879,7 @@
         <p:spPr>
           <a:xfrm>
             <a:off x="940000" y="5720000"/>
-            <a:ext cx="10500000" cy="520000"/>
+            <a:ext cx="10500000" cy="731520"/>
           </a:xfrm>
           <a:prstGeom prst="rect">
             <a:avLst/>
@@ -36943,13 +36901,24 @@
               </a:spcAft>
             </a:pPr>
             <a:r>
-              <a:rPr sz="1350" b="1">
+              <a:rPr sz="1050" b="1">
                 <a:solidFill>
                   <a:srgbClr val="010328"/>
                 </a:solidFill>
                 <a:latin typeface="微软雅黑"/>
               </a:rPr>
               <a:t>✔ 达标标准: 检索≥80%有引用</a:t>
+            </a:r>
+          </a:p>
+          <a:p>
+            <a:r>
+              <a:rPr sz="1050" b="1">
+                <a:solidFill>
+                  <a:srgbClr val="010328"/>
+                </a:solidFill>
+                <a:latin typeface="微软雅黑"/>
+              </a:rPr>
+              <a:t>✓ 本次实测达标 ｜ 功能OK</a:t>
             </a:r>
           </a:p>
         </p:txBody>
@@ -37077,7 +37046,7 @@
                 </a:solidFill>
                 <a:latin typeface="微软雅黑"/>
               </a:rPr>
-              <a:t>41 / 64</a:t>
+              <a:t>43 / 66</a:t>
             </a:r>
           </a:p>
         </p:txBody>
@@ -37841,7 +37810,7 @@
         <p:spPr>
           <a:xfrm>
             <a:off x="940000" y="5720000"/>
-            <a:ext cx="10500000" cy="520000"/>
+            <a:ext cx="10500000" cy="731520"/>
           </a:xfrm>
           <a:prstGeom prst="rect">
             <a:avLst/>
@@ -37863,13 +37832,24 @@
               </a:spcAft>
             </a:pPr>
             <a:r>
-              <a:rPr sz="1350" b="1">
+              <a:rPr sz="1050" b="1">
                 <a:solidFill>
                   <a:srgbClr val="010328"/>
                 </a:solidFill>
                 <a:latin typeface="微软雅黑"/>
               </a:rPr>
               <a:t>✔ 达标标准: 检索≥85%可溯源</a:t>
+            </a:r>
+          </a:p>
+          <a:p>
+            <a:r>
+              <a:rPr sz="1050" b="1">
+                <a:solidFill>
+                  <a:srgbClr val="010328"/>
+                </a:solidFill>
+                <a:latin typeface="微软雅黑"/>
+              </a:rPr>
+              <a:t>✓ 本次实测达标 ｜ 功能OK</a:t>
             </a:r>
           </a:p>
         </p:txBody>
@@ -37997,7 +37977,7 @@
                 </a:solidFill>
                 <a:latin typeface="微软雅黑"/>
               </a:rPr>
-              <a:t>42 / 64</a:t>
+              <a:t>44 / 66</a:t>
             </a:r>
           </a:p>
         </p:txBody>
@@ -38761,7 +38741,7 @@
         <p:spPr>
           <a:xfrm>
             <a:off x="940000" y="5720000"/>
-            <a:ext cx="10500000" cy="520000"/>
+            <a:ext cx="10500000" cy="731520"/>
           </a:xfrm>
           <a:prstGeom prst="rect">
             <a:avLst/>
@@ -38783,13 +38763,24 @@
               </a:spcAft>
             </a:pPr>
             <a:r>
-              <a:rPr sz="1350" b="1">
+              <a:rPr sz="1050" b="1">
                 <a:solidFill>
                   <a:srgbClr val="010328"/>
                 </a:solidFill>
                 <a:latin typeface="微软雅黑"/>
               </a:rPr>
               <a:t>✔ 达标标准: 检索≥90%加融合说明</a:t>
+            </a:r>
+          </a:p>
+          <a:p>
+            <a:r>
+              <a:rPr sz="1050" b="1">
+                <a:solidFill>
+                  <a:srgbClr val="010328"/>
+                </a:solidFill>
+                <a:latin typeface="微软雅黑"/>
+              </a:rPr>
+              <a:t>✓ 本次实测达标 ｜ 功能OK</a:t>
             </a:r>
           </a:p>
         </p:txBody>
@@ -38917,7 +38908,7 @@
                 </a:solidFill>
                 <a:latin typeface="微软雅黑"/>
               </a:rPr>
-              <a:t>43 / 64</a:t>
+              <a:t>45 / 66</a:t>
             </a:r>
           </a:p>
         </p:txBody>
@@ -39841,7 +39832,7 @@
                 </a:solidFill>
                 <a:latin typeface="微软雅黑"/>
               </a:rPr>
-              <a:t>44 / 64</a:t>
+              <a:t>46 / 66</a:t>
             </a:r>
           </a:p>
         </p:txBody>
@@ -41013,7 +41004,7 @@
                 </a:solidFill>
                 <a:latin typeface="微软雅黑"/>
               </a:rPr>
-              <a:t>45 / 64</a:t>
+              <a:t>47 / 66</a:t>
             </a:r>
           </a:p>
         </p:txBody>
@@ -41805,7 +41796,7 @@
                 </a:solidFill>
                 <a:latin typeface="微软雅黑"/>
               </a:rPr>
-              <a:t>46 / 64</a:t>
+              <a:t>48 / 66</a:t>
             </a:r>
           </a:p>
         </p:txBody>
@@ -42597,7 +42588,7 @@
                 </a:solidFill>
                 <a:latin typeface="微软雅黑"/>
               </a:rPr>
-              <a:t>47 / 64</a:t>
+              <a:t>49 / 66</a:t>
             </a:r>
           </a:p>
         </p:txBody>
@@ -43452,7 +43443,7 @@
                 </a:solidFill>
                 <a:latin typeface="微软雅黑"/>
               </a:rPr>
-              <a:t>48 / 64</a:t>
+              <a:t>50 / 66</a:t>
             </a:r>
           </a:p>
         </p:txBody>
@@ -44160,7 +44151,7 @@
                 </a:solidFill>
                 <a:latin typeface="微软雅黑"/>
               </a:rPr>
-              <a:t>49 / 64</a:t>
+              <a:t>51 / 66</a:t>
             </a:r>
           </a:p>
         </p:txBody>
@@ -45132,7 +45123,7 @@
                 </a:solidFill>
                 <a:latin typeface="微软雅黑"/>
               </a:rPr>
-              <a:t>5 / 64</a:t>
+              <a:t>5 / 66</a:t>
             </a:r>
           </a:p>
         </p:txBody>
@@ -45772,7 +45763,7 @@
                 </a:solidFill>
                 <a:latin typeface="微软雅黑"/>
               </a:rPr>
-              <a:t>50 / 64</a:t>
+              <a:t>52 / 66</a:t>
             </a:r>
           </a:p>
         </p:txBody>
@@ -46744,7 +46735,7 @@
                 </a:solidFill>
                 <a:latin typeface="微软雅黑"/>
               </a:rPr>
-              <a:t>51 / 64</a:t>
+              <a:t>53 / 66</a:t>
             </a:r>
           </a:p>
         </p:txBody>
@@ -47536,7 +47527,7 @@
                 </a:solidFill>
                 <a:latin typeface="微软雅黑"/>
               </a:rPr>
-              <a:t>52 / 64</a:t>
+              <a:t>54 / 66</a:t>
             </a:r>
           </a:p>
         </p:txBody>
@@ -49168,7 +49159,7 @@
                 </a:solidFill>
                 <a:latin typeface="微软雅黑"/>
               </a:rPr>
-              <a:t>53 / 64</a:t>
+              <a:t>55 / 66</a:t>
             </a:r>
           </a:p>
         </p:txBody>
@@ -49966,7 +49957,7 @@
                 </a:solidFill>
                 <a:latin typeface="微软雅黑"/>
               </a:rPr>
-              <a:t>54 / 64</a:t>
+              <a:t>56 / 66</a:t>
             </a:r>
           </a:p>
         </p:txBody>
@@ -51112,7 +51103,7 @@
                 </a:solidFill>
                 <a:latin typeface="微软雅黑"/>
               </a:rPr>
-              <a:t>55 / 64</a:t>
+              <a:t>57 / 66</a:t>
             </a:r>
           </a:p>
         </p:txBody>
@@ -51965,7 +51956,7 @@
                 </a:solidFill>
                 <a:latin typeface="微软雅黑"/>
               </a:rPr>
-              <a:t>56 / 64</a:t>
+              <a:t>58 / 66</a:t>
             </a:r>
           </a:p>
         </p:txBody>
@@ -52937,7 +52928,7 @@
                 </a:solidFill>
                 <a:latin typeface="微软雅黑"/>
               </a:rPr>
-              <a:t>57 / 64</a:t>
+              <a:t>59 / 66</a:t>
             </a:r>
           </a:p>
         </p:txBody>
@@ -53909,7 +53900,7 @@
                 </a:solidFill>
                 <a:latin typeface="微软雅黑"/>
               </a:rPr>
-              <a:t>58 / 64</a:t>
+              <a:t>60 / 66</a:t>
             </a:r>
           </a:p>
         </p:txBody>
@@ -54881,7 +54872,7 @@
                 </a:solidFill>
                 <a:latin typeface="微软雅黑"/>
               </a:rPr>
-              <a:t>59 / 64</a:t>
+              <a:t>61 / 66</a:t>
             </a:r>
           </a:p>
         </p:txBody>
@@ -56349,7 +56340,7 @@
                 </a:solidFill>
                 <a:latin typeface="微软雅黑"/>
               </a:rPr>
-              <a:t>6 / 64</a:t>
+              <a:t>6 / 66</a:t>
             </a:r>
           </a:p>
         </p:txBody>
@@ -57608,7 +57599,7 @@
                 </a:solidFill>
                 <a:latin typeface="微软雅黑"/>
               </a:rPr>
-              <a:t>60 / 64</a:t>
+              <a:t>62 / 66</a:t>
             </a:r>
           </a:p>
         </p:txBody>
@@ -58400,7 +58391,7 @@
                 </a:solidFill>
                 <a:latin typeface="微软雅黑"/>
               </a:rPr>
-              <a:t>61 / 64</a:t>
+              <a:t>63 / 66</a:t>
             </a:r>
           </a:p>
         </p:txBody>
@@ -59106,7 +59097,7 @@
                 </a:solidFill>
                 <a:latin typeface="微软雅黑"/>
               </a:rPr>
-              <a:t>62 / 64</a:t>
+              <a:t>64 / 66</a:t>
             </a:r>
           </a:p>
         </p:txBody>
@@ -59466,7 +59457,7 @@
                 </a:solidFill>
                 <a:latin typeface="微软雅黑"/>
               </a:rPr>
-              <a:t>63 / 64</a:t>
+              <a:t>65 / 66</a:t>
             </a:r>
           </a:p>
         </p:txBody>
@@ -59837,6 +59828,2142 @@
 </p:sld>
 </file>
 
+<file path=ppt/slides/slide65.xml><?xml version="1.0" encoding="utf-8"?>
+<p:sld xmlns:a="http://schemas.openxmlformats.org/drawingml/2006/main" xmlns:p="http://schemas.openxmlformats.org/presentationml/2006/main" xmlns:r="http://schemas.openxmlformats.org/officeDocument/2006/relationships">
+  <p:cSld>
+    <p:spTree>
+      <p:nvGrpSpPr>
+        <p:cNvPr id="1" name=""/>
+        <p:cNvGrpSpPr/>
+        <p:nvPr/>
+      </p:nvGrpSpPr>
+      <p:grpSpPr/>
+      <p:sp>
+        <p:nvSpPr>
+          <p:cNvPr id="2" name="Rectangle 1"/>
+          <p:cNvSpPr/>
+          <p:nvPr/>
+        </p:nvSpPr>
+        <p:spPr>
+          <a:xfrm>
+            <a:off x="0" y="0"/>
+            <a:ext cx="12192000" cy="1150000"/>
+          </a:xfrm>
+          <a:prstGeom prst="rect">
+            <a:avLst/>
+          </a:prstGeom>
+          <a:solidFill>
+            <a:srgbClr val="010328"/>
+          </a:solidFill>
+          <a:ln>
+            <a:noFill/>
+          </a:ln>
+          <a:effectLst/>
+        </p:spPr>
+        <p:style>
+          <a:lnRef idx="1">
+            <a:schemeClr val="accent1"/>
+          </a:lnRef>
+          <a:fillRef idx="3">
+            <a:schemeClr val="accent1"/>
+          </a:fillRef>
+          <a:effectRef idx="2">
+            <a:schemeClr val="accent1"/>
+          </a:effectRef>
+          <a:fontRef idx="minor">
+            <a:schemeClr val="lt1"/>
+          </a:fontRef>
+        </p:style>
+        <p:txBody>
+          <a:bodyPr rtlCol="0" anchor="ctr"/>
+          <a:lstStyle/>
+          <a:p>
+            <a:pPr algn="ctr"/>
+          </a:p>
+        </p:txBody>
+      </p:sp>
+      <p:sp>
+        <p:nvSpPr>
+          <p:cNvPr id="3" name="Rectangle 2"/>
+          <p:cNvSpPr/>
+          <p:nvPr/>
+        </p:nvSpPr>
+        <p:spPr>
+          <a:xfrm>
+            <a:off x="0" y="1150000"/>
+            <a:ext cx="2600000" cy="70000"/>
+          </a:xfrm>
+          <a:prstGeom prst="rect">
+            <a:avLst/>
+          </a:prstGeom>
+          <a:solidFill>
+            <a:srgbClr val="F5670F"/>
+          </a:solidFill>
+          <a:ln>
+            <a:noFill/>
+          </a:ln>
+          <a:effectLst/>
+        </p:spPr>
+        <p:style>
+          <a:lnRef idx="1">
+            <a:schemeClr val="accent1"/>
+          </a:lnRef>
+          <a:fillRef idx="3">
+            <a:schemeClr val="accent1"/>
+          </a:fillRef>
+          <a:effectRef idx="2">
+            <a:schemeClr val="accent1"/>
+          </a:effectRef>
+          <a:fontRef idx="minor">
+            <a:schemeClr val="lt1"/>
+          </a:fontRef>
+        </p:style>
+        <p:txBody>
+          <a:bodyPr rtlCol="0" anchor="ctr"/>
+          <a:lstStyle/>
+          <a:p>
+            <a:pPr algn="ctr"/>
+          </a:p>
+        </p:txBody>
+      </p:sp>
+      <p:sp>
+        <p:nvSpPr>
+          <p:cNvPr id="4" name="TextBox 3"/>
+          <p:cNvSpPr txBox="1"/>
+          <p:nvPr/>
+        </p:nvSpPr>
+        <p:spPr>
+          <a:xfrm>
+            <a:off x="700000" y="300000"/>
+            <a:ext cx="10792000" cy="700000"/>
+          </a:xfrm>
+          <a:prstGeom prst="rect">
+            <a:avLst/>
+          </a:prstGeom>
+          <a:noFill/>
+        </p:spPr>
+        <p:txBody>
+          <a:bodyPr wrap="square" anchor="t">
+            <a:spAutoFit/>
+          </a:bodyPr>
+          <a:lstStyle/>
+          <a:p>
+            <a:pPr algn="l">
+              <a:lnSpc>
+                <a:spcPct val="110000"/>
+              </a:lnSpc>
+              <a:spcAft>
+                <a:spcPts val="600"/>
+              </a:spcAft>
+            </a:pPr>
+            <a:r>
+              <a:rPr sz="2400" b="1">
+                <a:solidFill>
+                  <a:srgbClr val="FFFFFF"/>
+                </a:solidFill>
+                <a:latin typeface="微软雅黑"/>
+              </a:rPr>
+              <a:t>实测验收 · m42_rag</a:t>
+            </a:r>
+          </a:p>
+        </p:txBody>
+      </p:sp>
+      <p:sp>
+        <p:nvSpPr>
+          <p:cNvPr id="11" name="Rectangle 10"/>
+          <p:cNvSpPr/>
+          <p:nvPr/>
+        </p:nvSpPr>
+        <p:spPr>
+          <a:xfrm>
+            <a:off x="500000" y="6500000"/>
+            <a:ext cx="11100000" cy="20000"/>
+          </a:xfrm>
+          <a:prstGeom prst="rect">
+            <a:avLst/>
+          </a:prstGeom>
+          <a:solidFill>
+            <a:srgbClr val="C9D4EE"/>
+          </a:solidFill>
+          <a:ln>
+            <a:noFill/>
+          </a:ln>
+          <a:effectLst/>
+        </p:spPr>
+        <p:style>
+          <a:lnRef idx="1">
+            <a:schemeClr val="accent1"/>
+          </a:lnRef>
+          <a:fillRef idx="3">
+            <a:schemeClr val="accent1"/>
+          </a:fillRef>
+          <a:effectRef idx="2">
+            <a:schemeClr val="accent1"/>
+          </a:effectRef>
+          <a:fontRef idx="minor">
+            <a:schemeClr val="lt1"/>
+          </a:fontRef>
+        </p:style>
+        <p:txBody>
+          <a:bodyPr rtlCol="0" anchor="ctr"/>
+          <a:lstStyle/>
+          <a:p>
+            <a:pPr algn="ctr"/>
+          </a:p>
+        </p:txBody>
+      </p:sp>
+      <p:sp>
+        <p:nvSpPr>
+          <p:cNvPr id="12" name="TextBox 11"/>
+          <p:cNvSpPr txBox="1"/>
+          <p:nvPr/>
+        </p:nvSpPr>
+        <p:spPr>
+          <a:xfrm>
+            <a:off x="500000" y="6540000"/>
+            <a:ext cx="7000000" cy="300000"/>
+          </a:xfrm>
+          <a:prstGeom prst="rect">
+            <a:avLst/>
+          </a:prstGeom>
+          <a:noFill/>
+        </p:spPr>
+        <p:txBody>
+          <a:bodyPr wrap="square" anchor="t">
+            <a:spAutoFit/>
+          </a:bodyPr>
+          <a:lstStyle/>
+          <a:p>
+            <a:pPr algn="l">
+              <a:lnSpc>
+                <a:spcPct val="110000"/>
+              </a:lnSpc>
+              <a:spcAft>
+                <a:spcPts val="600"/>
+              </a:spcAft>
+            </a:pPr>
+            <a:r>
+              <a:rPr sz="1000" b="0">
+                <a:solidFill>
+                  <a:srgbClr val="8A97B5"/>
+                </a:solidFill>
+                <a:latin typeface="微软雅黑"/>
+              </a:rPr>
+              <a:t>两江智造集团 · AI应用基础48课时版</a:t>
+            </a:r>
+          </a:p>
+        </p:txBody>
+      </p:sp>
+      <p:sp>
+        <p:nvSpPr>
+          <p:cNvPr id="13" name="TextBox 12"/>
+          <p:cNvSpPr txBox="1"/>
+          <p:nvPr/>
+        </p:nvSpPr>
+        <p:spPr>
+          <a:xfrm>
+            <a:off x="10600000" y="6540000"/>
+            <a:ext cx="1000000" cy="300000"/>
+          </a:xfrm>
+          <a:prstGeom prst="rect">
+            <a:avLst/>
+          </a:prstGeom>
+          <a:noFill/>
+        </p:spPr>
+        <p:txBody>
+          <a:bodyPr wrap="square" anchor="t">
+            <a:spAutoFit/>
+          </a:bodyPr>
+          <a:lstStyle/>
+          <a:p>
+            <a:pPr algn="r">
+              <a:lnSpc>
+                <a:spcPct val="110000"/>
+              </a:lnSpc>
+              <a:spcAft>
+                <a:spcPts val="600"/>
+              </a:spcAft>
+            </a:pPr>
+            <a:r>
+              <a:rPr sz="1000" b="0">
+                <a:solidFill>
+                  <a:srgbClr val="8A97B5"/>
+                </a:solidFill>
+                <a:latin typeface="微软雅黑"/>
+              </a:rPr>
+              <a:t>39 / 66</a:t>
+            </a:r>
+          </a:p>
+        </p:txBody>
+      </p:sp>
+      <p:sp>
+        <p:nvSpPr>
+          <p:cNvPr id="14" name="Rectangle 13"/>
+          <p:cNvSpPr/>
+          <p:nvPr/>
+        </p:nvSpPr>
+        <p:spPr>
+          <a:xfrm>
+            <a:off x="0" y="1371600"/>
+            <a:ext cx="12188952" cy="713232"/>
+          </a:xfrm>
+          <a:prstGeom prst="rect">
+            <a:avLst/>
+          </a:prstGeom>
+          <a:solidFill>
+            <a:srgbClr val="F2F5F9"/>
+          </a:solidFill>
+          <a:ln>
+            <a:noFill/>
+          </a:ln>
+          <a:effectLst/>
+        </p:spPr>
+        <p:style>
+          <a:lnRef idx="1">
+            <a:schemeClr val="accent1"/>
+          </a:lnRef>
+          <a:fillRef idx="3">
+            <a:schemeClr val="accent1"/>
+          </a:fillRef>
+          <a:effectRef idx="2">
+            <a:schemeClr val="accent1"/>
+          </a:effectRef>
+          <a:fontRef idx="minor">
+            <a:schemeClr val="lt1"/>
+          </a:fontRef>
+        </p:style>
+        <p:txBody>
+          <a:bodyPr rtlCol="0" anchor="ctr" wrap="square"/>
+          <a:lstStyle/>
+          <a:p>
+            <a:pPr algn="ctr"/>
+          </a:p>
+        </p:txBody>
+      </p:sp>
+      <p:sp>
+        <p:nvSpPr>
+          <p:cNvPr id="15" name="TextBox 14"/>
+          <p:cNvSpPr txBox="1"/>
+          <p:nvPr/>
+        </p:nvSpPr>
+        <p:spPr>
+          <a:xfrm>
+            <a:off x="457200" y="1426464"/>
+            <a:ext cx="2651760" cy="566928"/>
+          </a:xfrm>
+          <a:prstGeom prst="rect">
+            <a:avLst/>
+          </a:prstGeom>
+          <a:noFill/>
+        </p:spPr>
+        <p:txBody>
+          <a:bodyPr wrap="square">
+            <a:spAutoFit/>
+          </a:bodyPr>
+          <a:lstStyle/>
+          <a:p>
+            <a:r>
+              <a:rPr sz="1400" b="1">
+                <a:solidFill>
+                  <a:srgbClr val="2E7D46"/>
+                </a:solidFill>
+                <a:latin typeface="微软雅黑"/>
+              </a:rPr>
+              <a:t>实测达成档位</a:t>
+            </a:r>
+          </a:p>
+          <a:p>
+            <a:r>
+              <a:rPr sz="1400" b="1">
+                <a:solidFill>
+                  <a:srgbClr val="2E7D46"/>
+                </a:solidFill>
+                <a:latin typeface="微软雅黑"/>
+              </a:rPr>
+              <a:t>优(A)</a:t>
+            </a:r>
+          </a:p>
+        </p:txBody>
+      </p:sp>
+      <p:sp>
+        <p:nvSpPr>
+          <p:cNvPr id="16" name="Rectangle 15"/>
+          <p:cNvSpPr/>
+          <p:nvPr/>
+        </p:nvSpPr>
+        <p:spPr>
+          <a:xfrm>
+            <a:off x="3200400" y="1426464"/>
+            <a:ext cx="1627632" cy="603504"/>
+          </a:xfrm>
+          <a:prstGeom prst="rect">
+            <a:avLst/>
+          </a:prstGeom>
+          <a:solidFill>
+            <a:srgbClr val="FFFFFF"/>
+          </a:solidFill>
+          <a:ln>
+            <a:solidFill>
+              <a:srgbClr val="D6DCE4"/>
+            </a:solidFill>
+          </a:ln>
+          <a:effectLst/>
+        </p:spPr>
+        <p:style>
+          <a:lnRef idx="1">
+            <a:schemeClr val="accent1"/>
+          </a:lnRef>
+          <a:fillRef idx="3">
+            <a:schemeClr val="accent1"/>
+          </a:fillRef>
+          <a:effectRef idx="2">
+            <a:schemeClr val="accent1"/>
+          </a:effectRef>
+          <a:fontRef idx="minor">
+            <a:schemeClr val="lt1"/>
+          </a:fontRef>
+        </p:style>
+        <p:txBody>
+          <a:bodyPr rtlCol="0" anchor="ctr" wrap="square"/>
+          <a:lstStyle/>
+          <a:p>
+            <a:pPr algn="ctr"/>
+          </a:p>
+        </p:txBody>
+      </p:sp>
+      <p:sp>
+        <p:nvSpPr>
+          <p:cNvPr id="17" name="TextBox 16"/>
+          <p:cNvSpPr txBox="1"/>
+          <p:nvPr/>
+        </p:nvSpPr>
+        <p:spPr>
+          <a:xfrm>
+            <a:off x="3246120" y="1463040"/>
+            <a:ext cx="1536192" cy="548640"/>
+          </a:xfrm>
+          <a:prstGeom prst="rect">
+            <a:avLst/>
+          </a:prstGeom>
+          <a:noFill/>
+        </p:spPr>
+        <p:txBody>
+          <a:bodyPr wrap="square">
+            <a:spAutoFit/>
+          </a:bodyPr>
+          <a:lstStyle/>
+          <a:p>
+            <a:r>
+              <a:rPr sz="900" b="0">
+                <a:solidFill>
+                  <a:srgbClr val="35506E"/>
+                </a:solidFill>
+                <a:latin typeface="微软雅黑"/>
+              </a:rPr>
+              <a:t>幻觉案例实测 3 条</a:t>
+            </a:r>
+          </a:p>
+        </p:txBody>
+      </p:sp>
+      <p:sp>
+        <p:nvSpPr>
+          <p:cNvPr id="18" name="Rectangle 17"/>
+          <p:cNvSpPr/>
+          <p:nvPr/>
+        </p:nvSpPr>
+        <p:spPr>
+          <a:xfrm>
+            <a:off x="4901184" y="1426464"/>
+            <a:ext cx="1627632" cy="603504"/>
+          </a:xfrm>
+          <a:prstGeom prst="rect">
+            <a:avLst/>
+          </a:prstGeom>
+          <a:solidFill>
+            <a:srgbClr val="FFFFFF"/>
+          </a:solidFill>
+          <a:ln>
+            <a:solidFill>
+              <a:srgbClr val="D6DCE4"/>
+            </a:solidFill>
+          </a:ln>
+          <a:effectLst/>
+        </p:spPr>
+        <p:style>
+          <a:lnRef idx="1">
+            <a:schemeClr val="accent1"/>
+          </a:lnRef>
+          <a:fillRef idx="3">
+            <a:schemeClr val="accent1"/>
+          </a:fillRef>
+          <a:effectRef idx="2">
+            <a:schemeClr val="accent1"/>
+          </a:effectRef>
+          <a:fontRef idx="minor">
+            <a:schemeClr val="lt1"/>
+          </a:fontRef>
+        </p:style>
+        <p:txBody>
+          <a:bodyPr rtlCol="0" anchor="ctr" wrap="square"/>
+          <a:lstStyle/>
+          <a:p>
+            <a:pPr algn="ctr"/>
+          </a:p>
+        </p:txBody>
+      </p:sp>
+      <p:sp>
+        <p:nvSpPr>
+          <p:cNvPr id="19" name="TextBox 18"/>
+          <p:cNvSpPr txBox="1"/>
+          <p:nvPr/>
+        </p:nvSpPr>
+        <p:spPr>
+          <a:xfrm>
+            <a:off x="4946904" y="1463040"/>
+            <a:ext cx="1536192" cy="548640"/>
+          </a:xfrm>
+          <a:prstGeom prst="rect">
+            <a:avLst/>
+          </a:prstGeom>
+          <a:noFill/>
+        </p:spPr>
+        <p:txBody>
+          <a:bodyPr wrap="square">
+            <a:spAutoFit/>
+          </a:bodyPr>
+          <a:lstStyle/>
+          <a:p>
+            <a:r>
+              <a:rPr sz="900" b="0">
+                <a:solidFill>
+                  <a:srgbClr val="35506E"/>
+                </a:solidFill>
+                <a:latin typeface="微软雅黑"/>
+              </a:rPr>
+              <a:t>检索命中率（RRF 融合通道 recall@3）100.0%</a:t>
+            </a:r>
+          </a:p>
+        </p:txBody>
+      </p:sp>
+      <p:sp>
+        <p:nvSpPr>
+          <p:cNvPr id="20" name="Rectangle 19"/>
+          <p:cNvSpPr/>
+          <p:nvPr/>
+        </p:nvSpPr>
+        <p:spPr>
+          <a:xfrm>
+            <a:off x="6601968" y="1426464"/>
+            <a:ext cx="1627632" cy="603504"/>
+          </a:xfrm>
+          <a:prstGeom prst="rect">
+            <a:avLst/>
+          </a:prstGeom>
+          <a:solidFill>
+            <a:srgbClr val="FFFFFF"/>
+          </a:solidFill>
+          <a:ln>
+            <a:solidFill>
+              <a:srgbClr val="D6DCE4"/>
+            </a:solidFill>
+          </a:ln>
+          <a:effectLst/>
+        </p:spPr>
+        <p:style>
+          <a:lnRef idx="1">
+            <a:schemeClr val="accent1"/>
+          </a:lnRef>
+          <a:fillRef idx="3">
+            <a:schemeClr val="accent1"/>
+          </a:fillRef>
+          <a:effectRef idx="2">
+            <a:schemeClr val="accent1"/>
+          </a:effectRef>
+          <a:fontRef idx="minor">
+            <a:schemeClr val="lt1"/>
+          </a:fontRef>
+        </p:style>
+        <p:txBody>
+          <a:bodyPr rtlCol="0" anchor="ctr" wrap="square"/>
+          <a:lstStyle/>
+          <a:p>
+            <a:pPr algn="ctr"/>
+          </a:p>
+        </p:txBody>
+      </p:sp>
+      <p:sp>
+        <p:nvSpPr>
+          <p:cNvPr id="21" name="TextBox 20"/>
+          <p:cNvSpPr txBox="1"/>
+          <p:nvPr/>
+        </p:nvSpPr>
+        <p:spPr>
+          <a:xfrm>
+            <a:off x="6647688" y="1463040"/>
+            <a:ext cx="1536192" cy="548640"/>
+          </a:xfrm>
+          <a:prstGeom prst="rect">
+            <a:avLst/>
+          </a:prstGeom>
+          <a:noFill/>
+        </p:spPr>
+        <p:txBody>
+          <a:bodyPr wrap="square">
+            <a:spAutoFit/>
+          </a:bodyPr>
+          <a:lstStyle/>
+          <a:p>
+            <a:r>
+              <a:rPr sz="900" b="0">
+                <a:solidFill>
+                  <a:srgbClr val="35506E"/>
+                </a:solidFill>
+                <a:latin typeface="微软雅黑"/>
+              </a:rPr>
+              <a:t>引用覆盖率 100%</a:t>
+            </a:r>
+          </a:p>
+        </p:txBody>
+      </p:sp>
+      <p:sp>
+        <p:nvSpPr>
+          <p:cNvPr id="22" name="Rectangle 21"/>
+          <p:cNvSpPr/>
+          <p:nvPr/>
+        </p:nvSpPr>
+        <p:spPr>
+          <a:xfrm>
+            <a:off x="8302752" y="1426464"/>
+            <a:ext cx="1627632" cy="603504"/>
+          </a:xfrm>
+          <a:prstGeom prst="rect">
+            <a:avLst/>
+          </a:prstGeom>
+          <a:solidFill>
+            <a:srgbClr val="FFFFFF"/>
+          </a:solidFill>
+          <a:ln>
+            <a:solidFill>
+              <a:srgbClr val="D6DCE4"/>
+            </a:solidFill>
+          </a:ln>
+          <a:effectLst/>
+        </p:spPr>
+        <p:style>
+          <a:lnRef idx="1">
+            <a:schemeClr val="accent1"/>
+          </a:lnRef>
+          <a:fillRef idx="3">
+            <a:schemeClr val="accent1"/>
+          </a:fillRef>
+          <a:effectRef idx="2">
+            <a:schemeClr val="accent1"/>
+          </a:effectRef>
+          <a:fontRef idx="minor">
+            <a:schemeClr val="lt1"/>
+          </a:fontRef>
+        </p:style>
+        <p:txBody>
+          <a:bodyPr rtlCol="0" anchor="ctr" wrap="square"/>
+          <a:lstStyle/>
+          <a:p>
+            <a:pPr algn="ctr"/>
+          </a:p>
+        </p:txBody>
+      </p:sp>
+      <p:sp>
+        <p:nvSpPr>
+          <p:cNvPr id="23" name="TextBox 22"/>
+          <p:cNvSpPr txBox="1"/>
+          <p:nvPr/>
+        </p:nvSpPr>
+        <p:spPr>
+          <a:xfrm>
+            <a:off x="8348472" y="1463040"/>
+            <a:ext cx="1536192" cy="548640"/>
+          </a:xfrm>
+          <a:prstGeom prst="rect">
+            <a:avLst/>
+          </a:prstGeom>
+          <a:noFill/>
+        </p:spPr>
+        <p:txBody>
+          <a:bodyPr wrap="square">
+            <a:spAutoFit/>
+          </a:bodyPr>
+          <a:lstStyle/>
+          <a:p>
+            <a:r>
+              <a:rPr sz="900" b="0">
+                <a:solidFill>
+                  <a:srgbClr val="35506E"/>
+                </a:solidFill>
+                <a:latin typeface="微软雅黑"/>
+              </a:rPr>
+              <a:t>可溯源比例 100%</a:t>
+            </a:r>
+          </a:p>
+        </p:txBody>
+      </p:sp>
+      <p:sp>
+        <p:nvSpPr>
+          <p:cNvPr id="24" name="Rectangle 23"/>
+          <p:cNvSpPr/>
+          <p:nvPr/>
+        </p:nvSpPr>
+        <p:spPr>
+          <a:xfrm>
+            <a:off x="10003536" y="1426464"/>
+            <a:ext cx="1627632" cy="603504"/>
+          </a:xfrm>
+          <a:prstGeom prst="rect">
+            <a:avLst/>
+          </a:prstGeom>
+          <a:solidFill>
+            <a:srgbClr val="FFFFFF"/>
+          </a:solidFill>
+          <a:ln>
+            <a:solidFill>
+              <a:srgbClr val="D6DCE4"/>
+            </a:solidFill>
+          </a:ln>
+          <a:effectLst/>
+        </p:spPr>
+        <p:style>
+          <a:lnRef idx="1">
+            <a:schemeClr val="accent1"/>
+          </a:lnRef>
+          <a:fillRef idx="3">
+            <a:schemeClr val="accent1"/>
+          </a:fillRef>
+          <a:effectRef idx="2">
+            <a:schemeClr val="accent1"/>
+          </a:effectRef>
+          <a:fontRef idx="minor">
+            <a:schemeClr val="lt1"/>
+          </a:fontRef>
+        </p:style>
+        <p:txBody>
+          <a:bodyPr rtlCol="0" anchor="ctr" wrap="square"/>
+          <a:lstStyle/>
+          <a:p>
+            <a:pPr algn="ctr"/>
+          </a:p>
+        </p:txBody>
+      </p:sp>
+      <p:sp>
+        <p:nvSpPr>
+          <p:cNvPr id="25" name="TextBox 24"/>
+          <p:cNvSpPr txBox="1"/>
+          <p:nvPr/>
+        </p:nvSpPr>
+        <p:spPr>
+          <a:xfrm>
+            <a:off x="10049256" y="1463040"/>
+            <a:ext cx="1536192" cy="548640"/>
+          </a:xfrm>
+          <a:prstGeom prst="rect">
+            <a:avLst/>
+          </a:prstGeom>
+          <a:noFill/>
+        </p:spPr>
+        <p:txBody>
+          <a:bodyPr wrap="square">
+            <a:spAutoFit/>
+          </a:bodyPr>
+          <a:lstStyle/>
+          <a:p>
+            <a:r>
+              <a:rPr sz="900" b="0">
+                <a:solidFill>
+                  <a:srgbClr val="35506E"/>
+                </a:solidFill>
+                <a:latin typeface="微软雅黑"/>
+              </a:rPr>
+              <a:t>融合说明 2 行</a:t>
+            </a:r>
+          </a:p>
+        </p:txBody>
+      </p:sp>
+      <p:graphicFrame>
+        <p:nvGraphicFramePr>
+          <p:cNvPr id="26" name="Table 25"/>
+          <p:cNvGraphicFramePr>
+            <a:graphicFrameLocks noGrp="1"/>
+          </p:cNvGraphicFramePr>
+          <p:nvPr/>
+        </p:nvGraphicFramePr>
+        <p:xfrm>
+          <a:off x="457200" y="2212848"/>
+          <a:ext cx="11274552" cy="2834640"/>
+        </p:xfrm>
+        <a:graphic>
+          <a:graphicData uri="http://schemas.openxmlformats.org/drawingml/2006/table">
+            <a:tbl>
+              <a:tblPr firstRow="1" bandRow="1">
+                <a:tableStyleId>{5C22544A-7EE6-4342-B048-85BDC9FD1C3A}</a:tableStyleId>
+              </a:tblPr>
+              <a:tblGrid>
+                <a:gridCol w="1188720"/>
+                <a:gridCol w="5120640"/>
+                <a:gridCol w="3886200"/>
+                <a:gridCol w="1078992"/>
+              </a:tblGrid>
+              <a:tr h="566928">
+                <a:tc>
+                  <a:txBody>
+                    <a:bodyPr/>
+                    <a:lstStyle/>
+                    <a:p>
+                      <a:r>
+                        <a:rPr sz="1050" b="1">
+                          <a:solidFill>
+                            <a:srgbClr val="FFFFFF"/>
+                          </a:solidFill>
+                          <a:latin typeface="微软雅黑"/>
+                        </a:rPr>
+                        <a:t>档位</a:t>
+                      </a:r>
+                    </a:p>
+                  </a:txBody>
+                  <a:tcPr>
+                    <a:solidFill>
+                      <a:srgbClr val="010328"/>
+                    </a:solidFill>
+                  </a:tcPr>
+                </a:tc>
+                <a:tc>
+                  <a:txBody>
+                    <a:bodyPr/>
+                    <a:lstStyle/>
+                    <a:p>
+                      <a:r>
+                        <a:rPr sz="1050" b="1">
+                          <a:solidFill>
+                            <a:srgbClr val="FFFFFF"/>
+                          </a:solidFill>
+                          <a:latin typeface="微软雅黑"/>
+                        </a:rPr>
+                        <a:t>工单验收标准（原文）</a:t>
+                      </a:r>
+                    </a:p>
+                  </a:txBody>
+                  <a:tcPr>
+                    <a:solidFill>
+                      <a:srgbClr val="010328"/>
+                    </a:solidFill>
+                  </a:tcPr>
+                </a:tc>
+                <a:tc>
+                  <a:txBody>
+                    <a:bodyPr/>
+                    <a:lstStyle/>
+                    <a:p>
+                      <a:r>
+                        <a:rPr sz="1050" b="1">
+                          <a:solidFill>
+                            <a:srgbClr val="FFFFFF"/>
+                          </a:solidFill>
+                          <a:latin typeface="微软雅黑"/>
+                        </a:rPr>
+                        <a:t>本次实测判定</a:t>
+                      </a:r>
+                    </a:p>
+                  </a:txBody>
+                  <a:tcPr>
+                    <a:solidFill>
+                      <a:srgbClr val="010328"/>
+                    </a:solidFill>
+                  </a:tcPr>
+                </a:tc>
+                <a:tc>
+                  <a:txBody>
+                    <a:bodyPr/>
+                    <a:lstStyle/>
+                    <a:p>
+                      <a:r>
+                        <a:rPr sz="1050" b="1">
+                          <a:solidFill>
+                            <a:srgbClr val="FFFFFF"/>
+                          </a:solidFill>
+                          <a:latin typeface="微软雅黑"/>
+                        </a:rPr>
+                        <a:t>判定</a:t>
+                      </a:r>
+                    </a:p>
+                  </a:txBody>
+                  <a:tcPr>
+                    <a:solidFill>
+                      <a:srgbClr val="010328"/>
+                    </a:solidFill>
+                  </a:tcPr>
+                </a:tc>
+              </a:tr>
+              <a:tr h="566928">
+                <a:tc>
+                  <a:txBody>
+                    <a:bodyPr/>
+                    <a:lstStyle/>
+                    <a:p>
+                      <a:r>
+                        <a:rPr sz="1000" b="1">
+                          <a:solidFill>
+                            <a:srgbClr val="2B2F36"/>
+                          </a:solidFill>
+                          <a:latin typeface="微软雅黑"/>
+                        </a:rPr>
+                        <a:t>及格(D)</a:t>
+                      </a:r>
+                    </a:p>
+                  </a:txBody>
+                  <a:tcPr>
+                    <a:solidFill>
+                      <a:srgbClr val="FFFFFF"/>
+                    </a:solidFill>
+                  </a:tcPr>
+                </a:tc>
+                <a:tc>
+                  <a:txBody>
+                    <a:bodyPr/>
+                    <a:lstStyle/>
+                    <a:p>
+                      <a:r>
+                        <a:rPr sz="950" b="0">
+                          <a:solidFill>
+                            <a:srgbClr val="2B2F36"/>
+                          </a:solidFill>
+                          <a:latin typeface="微软雅黑"/>
+                        </a:rPr>
+                        <a:t>幻觉案例≥2条；代码规范率≥70%</a:t>
+                      </a:r>
+                    </a:p>
+                  </a:txBody>
+                  <a:tcPr>
+                    <a:solidFill>
+                      <a:srgbClr val="FFFFFF"/>
+                    </a:solidFill>
+                  </a:tcPr>
+                </a:tc>
+                <a:tc>
+                  <a:txBody>
+                    <a:bodyPr/>
+                    <a:lstStyle/>
+                    <a:p>
+                      <a:r>
+                        <a:rPr sz="950" b="0">
+                          <a:solidFill>
+                            <a:srgbClr val="2B2F36"/>
+                          </a:solidFill>
+                          <a:latin typeface="微软雅黑"/>
+                        </a:rPr>
+                        <a:t>规范率门槛≥70% [达标] ｜ 功能OK</a:t>
+                      </a:r>
+                    </a:p>
+                  </a:txBody>
+                  <a:tcPr>
+                    <a:solidFill>
+                      <a:srgbClr val="FFFFFF"/>
+                    </a:solidFill>
+                  </a:tcPr>
+                </a:tc>
+                <a:tc>
+                  <a:txBody>
+                    <a:bodyPr/>
+                    <a:lstStyle/>
+                    <a:p>
+                      <a:r>
+                        <a:rPr sz="1000" b="1">
+                          <a:solidFill>
+                            <a:srgbClr val="2E7D46"/>
+                          </a:solidFill>
+                          <a:latin typeface="微软雅黑"/>
+                        </a:rPr>
+                        <a:t>✓ 达标</a:t>
+                      </a:r>
+                    </a:p>
+                  </a:txBody>
+                  <a:tcPr>
+                    <a:solidFill>
+                      <a:srgbClr val="FFFFFF"/>
+                    </a:solidFill>
+                  </a:tcPr>
+                </a:tc>
+              </a:tr>
+              <a:tr h="566928">
+                <a:tc>
+                  <a:txBody>
+                    <a:bodyPr/>
+                    <a:lstStyle/>
+                    <a:p>
+                      <a:r>
+                        <a:rPr sz="1000" b="1">
+                          <a:solidFill>
+                            <a:srgbClr val="2B2F36"/>
+                          </a:solidFill>
+                          <a:latin typeface="微软雅黑"/>
+                        </a:rPr>
+                        <a:t>良好(C)</a:t>
+                      </a:r>
+                    </a:p>
+                  </a:txBody>
+                  <a:tcPr>
+                    <a:solidFill>
+                      <a:srgbClr val="F7F9FB"/>
+                    </a:solidFill>
+                  </a:tcPr>
+                </a:tc>
+                <a:tc>
+                  <a:txBody>
+                    <a:bodyPr/>
+                    <a:lstStyle/>
+                    <a:p>
+                      <a:r>
+                        <a:rPr sz="950" b="0">
+                          <a:solidFill>
+                            <a:srgbClr val="2B2F36"/>
+                          </a:solidFill>
+                          <a:latin typeface="微软雅黑"/>
+                        </a:rPr>
+                        <a:t>检索≥80%有引用</a:t>
+                      </a:r>
+                    </a:p>
+                  </a:txBody>
+                  <a:tcPr>
+                    <a:solidFill>
+                      <a:srgbClr val="F7F9FB"/>
+                    </a:solidFill>
+                  </a:tcPr>
+                </a:tc>
+                <a:tc>
+                  <a:txBody>
+                    <a:bodyPr/>
+                    <a:lstStyle/>
+                    <a:p>
+                      <a:r>
+                        <a:rPr sz="950" b="0">
+                          <a:solidFill>
+                            <a:srgbClr val="2B2F36"/>
+                          </a:solidFill>
+                          <a:latin typeface="微软雅黑"/>
+                        </a:rPr>
+                        <a:t>功能OK</a:t>
+                      </a:r>
+                    </a:p>
+                  </a:txBody>
+                  <a:tcPr>
+                    <a:solidFill>
+                      <a:srgbClr val="F7F9FB"/>
+                    </a:solidFill>
+                  </a:tcPr>
+                </a:tc>
+                <a:tc>
+                  <a:txBody>
+                    <a:bodyPr/>
+                    <a:lstStyle/>
+                    <a:p>
+                      <a:r>
+                        <a:rPr sz="1000" b="1">
+                          <a:solidFill>
+                            <a:srgbClr val="2E7D46"/>
+                          </a:solidFill>
+                          <a:latin typeface="微软雅黑"/>
+                        </a:rPr>
+                        <a:t>✓ 达标</a:t>
+                      </a:r>
+                    </a:p>
+                  </a:txBody>
+                  <a:tcPr>
+                    <a:solidFill>
+                      <a:srgbClr val="F7F9FB"/>
+                    </a:solidFill>
+                  </a:tcPr>
+                </a:tc>
+              </a:tr>
+              <a:tr h="566928">
+                <a:tc>
+                  <a:txBody>
+                    <a:bodyPr/>
+                    <a:lstStyle/>
+                    <a:p>
+                      <a:r>
+                        <a:rPr sz="1000" b="1">
+                          <a:solidFill>
+                            <a:srgbClr val="2B2F36"/>
+                          </a:solidFill>
+                          <a:latin typeface="微软雅黑"/>
+                        </a:rPr>
+                        <a:t>优秀(B)</a:t>
+                      </a:r>
+                    </a:p>
+                  </a:txBody>
+                  <a:tcPr>
+                    <a:solidFill>
+                      <a:srgbClr val="FFFFFF"/>
+                    </a:solidFill>
+                  </a:tcPr>
+                </a:tc>
+                <a:tc>
+                  <a:txBody>
+                    <a:bodyPr/>
+                    <a:lstStyle/>
+                    <a:p>
+                      <a:r>
+                        <a:rPr sz="950" b="0">
+                          <a:solidFill>
+                            <a:srgbClr val="2B2F36"/>
+                          </a:solidFill>
+                          <a:latin typeface="微软雅黑"/>
+                        </a:rPr>
+                        <a:t>检索≥85%可溯源；决策记录完整</a:t>
+                      </a:r>
+                    </a:p>
+                  </a:txBody>
+                  <a:tcPr>
+                    <a:solidFill>
+                      <a:srgbClr val="FFFFFF"/>
+                    </a:solidFill>
+                  </a:tcPr>
+                </a:tc>
+                <a:tc>
+                  <a:txBody>
+                    <a:bodyPr/>
+                    <a:lstStyle/>
+                    <a:p>
+                      <a:r>
+                        <a:rPr sz="950" b="0">
+                          <a:solidFill>
+                            <a:srgbClr val="2B2F36"/>
+                          </a:solidFill>
+                          <a:latin typeface="微软雅黑"/>
+                        </a:rPr>
+                        <a:t>功能OK</a:t>
+                      </a:r>
+                    </a:p>
+                  </a:txBody>
+                  <a:tcPr>
+                    <a:solidFill>
+                      <a:srgbClr val="FFFFFF"/>
+                    </a:solidFill>
+                  </a:tcPr>
+                </a:tc>
+                <a:tc>
+                  <a:txBody>
+                    <a:bodyPr/>
+                    <a:lstStyle/>
+                    <a:p>
+                      <a:r>
+                        <a:rPr sz="1000" b="1">
+                          <a:solidFill>
+                            <a:srgbClr val="2E7D46"/>
+                          </a:solidFill>
+                          <a:latin typeface="微软雅黑"/>
+                        </a:rPr>
+                        <a:t>✓ 达标</a:t>
+                      </a:r>
+                    </a:p>
+                  </a:txBody>
+                  <a:tcPr>
+                    <a:solidFill>
+                      <a:srgbClr val="FFFFFF"/>
+                    </a:solidFill>
+                  </a:tcPr>
+                </a:tc>
+              </a:tr>
+              <a:tr h="566928">
+                <a:tc>
+                  <a:txBody>
+                    <a:bodyPr/>
+                    <a:lstStyle/>
+                    <a:p>
+                      <a:r>
+                        <a:rPr sz="1000" b="1">
+                          <a:solidFill>
+                            <a:srgbClr val="2B2F36"/>
+                          </a:solidFill>
+                          <a:latin typeface="微软雅黑"/>
+                        </a:rPr>
+                        <a:t>优(A)</a:t>
+                      </a:r>
+                    </a:p>
+                  </a:txBody>
+                  <a:tcPr>
+                    <a:solidFill>
+                      <a:srgbClr val="F7F9FB"/>
+                    </a:solidFill>
+                  </a:tcPr>
+                </a:tc>
+                <a:tc>
+                  <a:txBody>
+                    <a:bodyPr/>
+                    <a:lstStyle/>
+                    <a:p>
+                      <a:r>
+                        <a:rPr sz="950" b="0">
+                          <a:solidFill>
+                            <a:srgbClr val="2B2F36"/>
+                          </a:solidFill>
+                          <a:latin typeface="微软雅黑"/>
+                        </a:rPr>
+                        <a:t>检索≥90%加融合说明</a:t>
+                      </a:r>
+                    </a:p>
+                  </a:txBody>
+                  <a:tcPr>
+                    <a:solidFill>
+                      <a:srgbClr val="F7F9FB"/>
+                    </a:solidFill>
+                  </a:tcPr>
+                </a:tc>
+                <a:tc>
+                  <a:txBody>
+                    <a:bodyPr/>
+                    <a:lstStyle/>
+                    <a:p>
+                      <a:r>
+                        <a:rPr sz="950" b="0">
+                          <a:solidFill>
+                            <a:srgbClr val="2B2F36"/>
+                          </a:solidFill>
+                          <a:latin typeface="微软雅黑"/>
+                        </a:rPr>
+                        <a:t>功能OK</a:t>
+                      </a:r>
+                    </a:p>
+                  </a:txBody>
+                  <a:tcPr>
+                    <a:solidFill>
+                      <a:srgbClr val="F7F9FB"/>
+                    </a:solidFill>
+                  </a:tcPr>
+                </a:tc>
+                <a:tc>
+                  <a:txBody>
+                    <a:bodyPr/>
+                    <a:lstStyle/>
+                    <a:p>
+                      <a:r>
+                        <a:rPr sz="1000" b="1">
+                          <a:solidFill>
+                            <a:srgbClr val="2E7D46"/>
+                          </a:solidFill>
+                          <a:latin typeface="微软雅黑"/>
+                        </a:rPr>
+                        <a:t>✓ 达标</a:t>
+                      </a:r>
+                    </a:p>
+                  </a:txBody>
+                  <a:tcPr>
+                    <a:solidFill>
+                      <a:srgbClr val="F7F9FB"/>
+                    </a:solidFill>
+                  </a:tcPr>
+                </a:tc>
+              </a:tr>
+            </a:tbl>
+          </a:graphicData>
+        </a:graphic>
+      </p:graphicFrame>
+      <p:sp>
+        <p:nvSpPr>
+          <p:cNvPr id="27" name="Rectangle 26"/>
+          <p:cNvSpPr/>
+          <p:nvPr/>
+        </p:nvSpPr>
+        <p:spPr>
+          <a:xfrm>
+            <a:off x="457200" y="5138928"/>
+            <a:ext cx="11274552" cy="1261872"/>
+          </a:xfrm>
+          <a:prstGeom prst="rect">
+            <a:avLst/>
+          </a:prstGeom>
+          <a:solidFill>
+            <a:srgbClr val="FFF7E8"/>
+          </a:solidFill>
+          <a:ln>
+            <a:solidFill>
+              <a:srgbClr val="E8C88A"/>
+            </a:solidFill>
+          </a:ln>
+          <a:effectLst/>
+        </p:spPr>
+        <p:style>
+          <a:lnRef idx="1">
+            <a:schemeClr val="accent1"/>
+          </a:lnRef>
+          <a:fillRef idx="3">
+            <a:schemeClr val="accent1"/>
+          </a:fillRef>
+          <a:effectRef idx="2">
+            <a:schemeClr val="accent1"/>
+          </a:effectRef>
+          <a:fontRef idx="minor">
+            <a:schemeClr val="lt1"/>
+          </a:fontRef>
+        </p:style>
+        <p:txBody>
+          <a:bodyPr rtlCol="0" anchor="ctr" wrap="square"/>
+          <a:lstStyle/>
+          <a:p>
+            <a:pPr algn="ctr"/>
+          </a:p>
+        </p:txBody>
+      </p:sp>
+      <p:sp>
+        <p:nvSpPr>
+          <p:cNvPr id="28" name="TextBox 27"/>
+          <p:cNvSpPr txBox="1"/>
+          <p:nvPr/>
+        </p:nvSpPr>
+        <p:spPr>
+          <a:xfrm>
+            <a:off x="621792" y="5212080"/>
+            <a:ext cx="10927080" cy="1133856"/>
+          </a:xfrm>
+          <a:prstGeom prst="rect">
+            <a:avLst/>
+          </a:prstGeom>
+          <a:noFill/>
+        </p:spPr>
+        <p:txBody>
+          <a:bodyPr wrap="square">
+            <a:spAutoFit/>
+          </a:bodyPr>
+          <a:lstStyle/>
+          <a:p>
+            <a:r>
+              <a:rPr sz="950" b="0">
+                <a:solidFill>
+                  <a:srgbClr val="6B4E16"/>
+                </a:solidFill>
+                <a:latin typeface="微软雅黑"/>
+              </a:rPr>
+              <a:t>人工答辩项 1 条（代码不代判，答辩现场确认，逐条见下页 report.txt 截图）</a:t>
+            </a:r>
+          </a:p>
+          <a:p>
+            <a:r>
+              <a:rPr sz="950" b="0">
+                <a:solidFill>
+                  <a:srgbClr val="6B4E16"/>
+                </a:solidFill>
+                <a:latin typeface="微软雅黑"/>
+              </a:rPr>
+              <a:t>档位是算出来的：判定值由 run.py 本次真跑产生；工单未给数字的门槛在报告里标注为「兜底口径·非工单数字」。</a:t>
+            </a:r>
+          </a:p>
+          <a:p>
+            <a:r>
+              <a:rPr sz="950" b="0">
+                <a:solidFill>
+                  <a:srgbClr val="6B4E16"/>
+                </a:solidFill>
+                <a:latin typeface="微软雅黑"/>
+              </a:rPr>
+              <a:t>实测值共 7 项，本页只列前 5 项，其余见下页 report.txt 截图。</a:t>
+            </a:r>
+          </a:p>
+        </p:txBody>
+      </p:sp>
+    </p:spTree>
+  </p:cSld>
+  <p:clrMapOvr>
+    <a:masterClrMapping/>
+  </p:clrMapOvr>
+</p:sld>
+</file>
+
+<file path=ppt/slides/slide66.xml><?xml version="1.0" encoding="utf-8"?>
+<p:sld xmlns:a="http://schemas.openxmlformats.org/drawingml/2006/main" xmlns:p="http://schemas.openxmlformats.org/presentationml/2006/main" xmlns:r="http://schemas.openxmlformats.org/officeDocument/2006/relationships">
+  <p:cSld>
+    <p:spTree>
+      <p:nvGrpSpPr>
+        <p:cNvPr id="1" name=""/>
+        <p:cNvGrpSpPr/>
+        <p:nvPr/>
+      </p:nvGrpSpPr>
+      <p:grpSpPr/>
+      <p:sp>
+        <p:nvSpPr>
+          <p:cNvPr id="2" name="Rectangle 1"/>
+          <p:cNvSpPr/>
+          <p:nvPr/>
+        </p:nvSpPr>
+        <p:spPr>
+          <a:xfrm>
+            <a:off x="0" y="0"/>
+            <a:ext cx="12192000" cy="1150000"/>
+          </a:xfrm>
+          <a:prstGeom prst="rect">
+            <a:avLst/>
+          </a:prstGeom>
+          <a:solidFill>
+            <a:srgbClr val="010328"/>
+          </a:solidFill>
+          <a:ln>
+            <a:noFill/>
+          </a:ln>
+          <a:effectLst/>
+        </p:spPr>
+        <p:style>
+          <a:lnRef idx="1">
+            <a:schemeClr val="accent1"/>
+          </a:lnRef>
+          <a:fillRef idx="3">
+            <a:schemeClr val="accent1"/>
+          </a:fillRef>
+          <a:effectRef idx="2">
+            <a:schemeClr val="accent1"/>
+          </a:effectRef>
+          <a:fontRef idx="minor">
+            <a:schemeClr val="lt1"/>
+          </a:fontRef>
+        </p:style>
+        <p:txBody>
+          <a:bodyPr rtlCol="0" anchor="ctr"/>
+          <a:lstStyle/>
+          <a:p>
+            <a:pPr algn="ctr"/>
+          </a:p>
+        </p:txBody>
+      </p:sp>
+      <p:sp>
+        <p:nvSpPr>
+          <p:cNvPr id="3" name="Rectangle 2"/>
+          <p:cNvSpPr/>
+          <p:nvPr/>
+        </p:nvSpPr>
+        <p:spPr>
+          <a:xfrm>
+            <a:off x="0" y="1150000"/>
+            <a:ext cx="2600000" cy="70000"/>
+          </a:xfrm>
+          <a:prstGeom prst="rect">
+            <a:avLst/>
+          </a:prstGeom>
+          <a:solidFill>
+            <a:srgbClr val="F5670F"/>
+          </a:solidFill>
+          <a:ln>
+            <a:noFill/>
+          </a:ln>
+          <a:effectLst/>
+        </p:spPr>
+        <p:style>
+          <a:lnRef idx="1">
+            <a:schemeClr val="accent1"/>
+          </a:lnRef>
+          <a:fillRef idx="3">
+            <a:schemeClr val="accent1"/>
+          </a:fillRef>
+          <a:effectRef idx="2">
+            <a:schemeClr val="accent1"/>
+          </a:effectRef>
+          <a:fontRef idx="minor">
+            <a:schemeClr val="lt1"/>
+          </a:fontRef>
+        </p:style>
+        <p:txBody>
+          <a:bodyPr rtlCol="0" anchor="ctr"/>
+          <a:lstStyle/>
+          <a:p>
+            <a:pPr algn="ctr"/>
+          </a:p>
+        </p:txBody>
+      </p:sp>
+      <p:sp>
+        <p:nvSpPr>
+          <p:cNvPr id="4" name="TextBox 3"/>
+          <p:cNvSpPr txBox="1"/>
+          <p:nvPr/>
+        </p:nvSpPr>
+        <p:spPr>
+          <a:xfrm>
+            <a:off x="700000" y="300000"/>
+            <a:ext cx="10792000" cy="700000"/>
+          </a:xfrm>
+          <a:prstGeom prst="rect">
+            <a:avLst/>
+          </a:prstGeom>
+          <a:noFill/>
+        </p:spPr>
+        <p:txBody>
+          <a:bodyPr wrap="square" anchor="t">
+            <a:spAutoFit/>
+          </a:bodyPr>
+          <a:lstStyle/>
+          <a:p>
+            <a:pPr algn="l">
+              <a:lnSpc>
+                <a:spcPct val="110000"/>
+              </a:lnSpc>
+              <a:spcAft>
+                <a:spcPts val="600"/>
+              </a:spcAft>
+            </a:pPr>
+            <a:r>
+              <a:rPr sz="2400" b="1">
+                <a:solidFill>
+                  <a:srgbClr val="FFFFFF"/>
+                </a:solidFill>
+                <a:latin typeface="微软雅黑"/>
+              </a:rPr>
+              <a:t>实跑截图证据 · m42_rag</a:t>
+            </a:r>
+          </a:p>
+        </p:txBody>
+      </p:sp>
+      <p:sp>
+        <p:nvSpPr>
+          <p:cNvPr id="11" name="Rectangle 10"/>
+          <p:cNvSpPr/>
+          <p:nvPr/>
+        </p:nvSpPr>
+        <p:spPr>
+          <a:xfrm>
+            <a:off x="500000" y="6500000"/>
+            <a:ext cx="11100000" cy="20000"/>
+          </a:xfrm>
+          <a:prstGeom prst="rect">
+            <a:avLst/>
+          </a:prstGeom>
+          <a:solidFill>
+            <a:srgbClr val="C9D4EE"/>
+          </a:solidFill>
+          <a:ln>
+            <a:noFill/>
+          </a:ln>
+          <a:effectLst/>
+        </p:spPr>
+        <p:style>
+          <a:lnRef idx="1">
+            <a:schemeClr val="accent1"/>
+          </a:lnRef>
+          <a:fillRef idx="3">
+            <a:schemeClr val="accent1"/>
+          </a:fillRef>
+          <a:effectRef idx="2">
+            <a:schemeClr val="accent1"/>
+          </a:effectRef>
+          <a:fontRef idx="minor">
+            <a:schemeClr val="lt1"/>
+          </a:fontRef>
+        </p:style>
+        <p:txBody>
+          <a:bodyPr rtlCol="0" anchor="ctr"/>
+          <a:lstStyle/>
+          <a:p>
+            <a:pPr algn="ctr"/>
+          </a:p>
+        </p:txBody>
+      </p:sp>
+      <p:sp>
+        <p:nvSpPr>
+          <p:cNvPr id="12" name="TextBox 11"/>
+          <p:cNvSpPr txBox="1"/>
+          <p:nvPr/>
+        </p:nvSpPr>
+        <p:spPr>
+          <a:xfrm>
+            <a:off x="500000" y="6540000"/>
+            <a:ext cx="7000000" cy="300000"/>
+          </a:xfrm>
+          <a:prstGeom prst="rect">
+            <a:avLst/>
+          </a:prstGeom>
+          <a:noFill/>
+        </p:spPr>
+        <p:txBody>
+          <a:bodyPr wrap="square" anchor="t">
+            <a:spAutoFit/>
+          </a:bodyPr>
+          <a:lstStyle/>
+          <a:p>
+            <a:pPr algn="l">
+              <a:lnSpc>
+                <a:spcPct val="110000"/>
+              </a:lnSpc>
+              <a:spcAft>
+                <a:spcPts val="600"/>
+              </a:spcAft>
+            </a:pPr>
+            <a:r>
+              <a:rPr sz="1000" b="0">
+                <a:solidFill>
+                  <a:srgbClr val="8A97B5"/>
+                </a:solidFill>
+                <a:latin typeface="微软雅黑"/>
+              </a:rPr>
+              <a:t>两江智造集团 · AI应用基础48课时版</a:t>
+            </a:r>
+          </a:p>
+        </p:txBody>
+      </p:sp>
+      <p:sp>
+        <p:nvSpPr>
+          <p:cNvPr id="13" name="TextBox 12"/>
+          <p:cNvSpPr txBox="1"/>
+          <p:nvPr/>
+        </p:nvSpPr>
+        <p:spPr>
+          <a:xfrm>
+            <a:off x="10600000" y="6540000"/>
+            <a:ext cx="1000000" cy="300000"/>
+          </a:xfrm>
+          <a:prstGeom prst="rect">
+            <a:avLst/>
+          </a:prstGeom>
+          <a:noFill/>
+        </p:spPr>
+        <p:txBody>
+          <a:bodyPr wrap="square" anchor="t">
+            <a:spAutoFit/>
+          </a:bodyPr>
+          <a:lstStyle/>
+          <a:p>
+            <a:pPr algn="r">
+              <a:lnSpc>
+                <a:spcPct val="110000"/>
+              </a:lnSpc>
+              <a:spcAft>
+                <a:spcPts val="600"/>
+              </a:spcAft>
+            </a:pPr>
+            <a:r>
+              <a:rPr sz="1000" b="0">
+                <a:solidFill>
+                  <a:srgbClr val="8A97B5"/>
+                </a:solidFill>
+                <a:latin typeface="微软雅黑"/>
+              </a:rPr>
+              <a:t>40 / 66</a:t>
+            </a:r>
+          </a:p>
+        </p:txBody>
+      </p:sp>
+      <p:sp>
+        <p:nvSpPr>
+          <p:cNvPr id="14" name="Rectangle 13"/>
+          <p:cNvSpPr/>
+          <p:nvPr/>
+        </p:nvSpPr>
+        <p:spPr>
+          <a:xfrm>
+            <a:off x="457200" y="1481328"/>
+            <a:ext cx="5486400" cy="2304288"/>
+          </a:xfrm>
+          <a:prstGeom prst="rect">
+            <a:avLst/>
+          </a:prstGeom>
+          <a:solidFill>
+            <a:srgbClr val="FFFFFF"/>
+          </a:solidFill>
+          <a:ln>
+            <a:solidFill>
+              <a:srgbClr val="D6DCE4"/>
+            </a:solidFill>
+          </a:ln>
+          <a:effectLst/>
+        </p:spPr>
+        <p:style>
+          <a:lnRef idx="1">
+            <a:schemeClr val="accent1"/>
+          </a:lnRef>
+          <a:fillRef idx="3">
+            <a:schemeClr val="accent1"/>
+          </a:fillRef>
+          <a:effectRef idx="2">
+            <a:schemeClr val="accent1"/>
+          </a:effectRef>
+          <a:fontRef idx="minor">
+            <a:schemeClr val="lt1"/>
+          </a:fontRef>
+        </p:style>
+        <p:txBody>
+          <a:bodyPr rtlCol="0" anchor="ctr" wrap="square"/>
+          <a:lstStyle/>
+          <a:p>
+            <a:pPr algn="ctr"/>
+          </a:p>
+        </p:txBody>
+      </p:sp>
+      <p:sp>
+        <p:nvSpPr>
+          <p:cNvPr id="15" name="TextBox 14"/>
+          <p:cNvSpPr txBox="1"/>
+          <p:nvPr/>
+        </p:nvSpPr>
+        <p:spPr>
+          <a:xfrm>
+            <a:off x="530352" y="1517904"/>
+            <a:ext cx="5340096" cy="237744"/>
+          </a:xfrm>
+          <a:prstGeom prst="rect">
+            <a:avLst/>
+          </a:prstGeom>
+          <a:noFill/>
+        </p:spPr>
+        <p:txBody>
+          <a:bodyPr wrap="square">
+            <a:spAutoFit/>
+          </a:bodyPr>
+          <a:lstStyle/>
+          <a:p>
+            <a:r>
+              <a:rPr sz="950" b="1">
+                <a:solidFill>
+                  <a:srgbClr val="010328"/>
+                </a:solidFill>
+                <a:latin typeface="微软雅黑"/>
+              </a:rPr>
+              <a:t>① run.py 实跑终端输出（逐字捕获）</a:t>
+            </a:r>
+          </a:p>
+        </p:txBody>
+      </p:sp>
+      <p:pic>
+        <p:nvPicPr>
+          <p:cNvPr id="16" name="Picture 15" descr="shot_run.png"/>
+          <p:cNvPicPr>
+            <a:picLocks noChangeAspect="1"/>
+          </p:cNvPicPr>
+          <p:nvPr/>
+        </p:nvPicPr>
+        <p:blipFill>
+          <a:blip r:embed="rId2"/>
+          <a:stretch>
+            <a:fillRect/>
+          </a:stretch>
+        </p:blipFill>
+        <p:spPr>
+          <a:xfrm>
+            <a:off x="964038" y="1773936"/>
+            <a:ext cx="4472722" cy="1956816"/>
+          </a:xfrm>
+          <a:prstGeom prst="rect">
+            <a:avLst/>
+          </a:prstGeom>
+        </p:spPr>
+      </p:pic>
+      <p:sp>
+        <p:nvSpPr>
+          <p:cNvPr id="17" name="Rectangle 16"/>
+          <p:cNvSpPr/>
+          <p:nvPr/>
+        </p:nvSpPr>
+        <p:spPr>
+          <a:xfrm>
+            <a:off x="6327648" y="1481328"/>
+            <a:ext cx="5486400" cy="2304288"/>
+          </a:xfrm>
+          <a:prstGeom prst="rect">
+            <a:avLst/>
+          </a:prstGeom>
+          <a:solidFill>
+            <a:srgbClr val="FFFFFF"/>
+          </a:solidFill>
+          <a:ln>
+            <a:solidFill>
+              <a:srgbClr val="D6DCE4"/>
+            </a:solidFill>
+          </a:ln>
+          <a:effectLst/>
+        </p:spPr>
+        <p:style>
+          <a:lnRef idx="1">
+            <a:schemeClr val="accent1"/>
+          </a:lnRef>
+          <a:fillRef idx="3">
+            <a:schemeClr val="accent1"/>
+          </a:fillRef>
+          <a:effectRef idx="2">
+            <a:schemeClr val="accent1"/>
+          </a:effectRef>
+          <a:fontRef idx="minor">
+            <a:schemeClr val="lt1"/>
+          </a:fontRef>
+        </p:style>
+        <p:txBody>
+          <a:bodyPr rtlCol="0" anchor="ctr" wrap="square"/>
+          <a:lstStyle/>
+          <a:p>
+            <a:pPr algn="ctr"/>
+          </a:p>
+        </p:txBody>
+      </p:sp>
+      <p:sp>
+        <p:nvSpPr>
+          <p:cNvPr id="18" name="TextBox 17"/>
+          <p:cNvSpPr txBox="1"/>
+          <p:nvPr/>
+        </p:nvSpPr>
+        <p:spPr>
+          <a:xfrm>
+            <a:off x="6400800" y="1517904"/>
+            <a:ext cx="5340096" cy="237744"/>
+          </a:xfrm>
+          <a:prstGeom prst="rect">
+            <a:avLst/>
+          </a:prstGeom>
+          <a:noFill/>
+        </p:spPr>
+        <p:txBody>
+          <a:bodyPr wrap="square">
+            <a:spAutoFit/>
+          </a:bodyPr>
+          <a:lstStyle/>
+          <a:p>
+            <a:r>
+              <a:rPr sz="950" b="1">
+                <a:solidFill>
+                  <a:srgbClr val="010328"/>
+                </a:solidFill>
+                <a:latin typeface="微软雅黑"/>
+              </a:rPr>
+              <a:t>② pytest 全绿终端输出（逐字捕获）</a:t>
+            </a:r>
+          </a:p>
+        </p:txBody>
+      </p:sp>
+      <p:pic>
+        <p:nvPicPr>
+          <p:cNvPr id="19" name="Picture 18" descr="shot_test.png"/>
+          <p:cNvPicPr>
+            <a:picLocks noChangeAspect="1"/>
+          </p:cNvPicPr>
+          <p:nvPr/>
+        </p:nvPicPr>
+        <p:blipFill>
+          <a:blip r:embed="rId3"/>
+          <a:stretch>
+            <a:fillRect/>
+          </a:stretch>
+        </p:blipFill>
+        <p:spPr>
+          <a:xfrm>
+            <a:off x="6834486" y="1773936"/>
+            <a:ext cx="4472722" cy="1956816"/>
+          </a:xfrm>
+          <a:prstGeom prst="rect">
+            <a:avLst/>
+          </a:prstGeom>
+        </p:spPr>
+      </p:pic>
+      <p:sp>
+        <p:nvSpPr>
+          <p:cNvPr id="20" name="Rectangle 19"/>
+          <p:cNvSpPr/>
+          <p:nvPr/>
+        </p:nvSpPr>
+        <p:spPr>
+          <a:xfrm>
+            <a:off x="457200" y="3877056"/>
+            <a:ext cx="5486400" cy="2304288"/>
+          </a:xfrm>
+          <a:prstGeom prst="rect">
+            <a:avLst/>
+          </a:prstGeom>
+          <a:solidFill>
+            <a:srgbClr val="FFFFFF"/>
+          </a:solidFill>
+          <a:ln>
+            <a:solidFill>
+              <a:srgbClr val="D6DCE4"/>
+            </a:solidFill>
+          </a:ln>
+          <a:effectLst/>
+        </p:spPr>
+        <p:style>
+          <a:lnRef idx="1">
+            <a:schemeClr val="accent1"/>
+          </a:lnRef>
+          <a:fillRef idx="3">
+            <a:schemeClr val="accent1"/>
+          </a:fillRef>
+          <a:effectRef idx="2">
+            <a:schemeClr val="accent1"/>
+          </a:effectRef>
+          <a:fontRef idx="minor">
+            <a:schemeClr val="lt1"/>
+          </a:fontRef>
+        </p:style>
+        <p:txBody>
+          <a:bodyPr rtlCol="0" anchor="ctr" wrap="square"/>
+          <a:lstStyle/>
+          <a:p>
+            <a:pPr algn="ctr"/>
+          </a:p>
+        </p:txBody>
+      </p:sp>
+      <p:sp>
+        <p:nvSpPr>
+          <p:cNvPr id="21" name="TextBox 20"/>
+          <p:cNvSpPr txBox="1"/>
+          <p:nvPr/>
+        </p:nvSpPr>
+        <p:spPr>
+          <a:xfrm>
+            <a:off x="530352" y="3913632"/>
+            <a:ext cx="5340096" cy="237744"/>
+          </a:xfrm>
+          <a:prstGeom prst="rect">
+            <a:avLst/>
+          </a:prstGeom>
+          <a:noFill/>
+        </p:spPr>
+        <p:txBody>
+          <a:bodyPr wrap="square">
+            <a:spAutoFit/>
+          </a:bodyPr>
+          <a:lstStyle/>
+          <a:p>
+            <a:r>
+              <a:rPr sz="950" b="1">
+                <a:solidFill>
+                  <a:srgbClr val="010328"/>
+                </a:solidFill>
+                <a:latin typeface="微软雅黑"/>
+              </a:rPr>
+              <a:t>③ report.txt「验收档位判定（实测）」段</a:t>
+            </a:r>
+          </a:p>
+        </p:txBody>
+      </p:sp>
+      <p:pic>
+        <p:nvPicPr>
+          <p:cNvPr id="22" name="Picture 21" descr="shot_report.png"/>
+          <p:cNvPicPr>
+            <a:picLocks noChangeAspect="1"/>
+          </p:cNvPicPr>
+          <p:nvPr/>
+        </p:nvPicPr>
+        <p:blipFill>
+          <a:blip r:embed="rId4"/>
+          <a:stretch>
+            <a:fillRect/>
+          </a:stretch>
+        </p:blipFill>
+        <p:spPr>
+          <a:xfrm>
+            <a:off x="964038" y="4169664"/>
+            <a:ext cx="4472722" cy="1956816"/>
+          </a:xfrm>
+          <a:prstGeom prst="rect">
+            <a:avLst/>
+          </a:prstGeom>
+        </p:spPr>
+      </p:pic>
+      <p:sp>
+        <p:nvSpPr>
+          <p:cNvPr id="23" name="Rectangle 22"/>
+          <p:cNvSpPr/>
+          <p:nvPr/>
+        </p:nvSpPr>
+        <p:spPr>
+          <a:xfrm>
+            <a:off x="6327648" y="3877056"/>
+            <a:ext cx="5486400" cy="2304288"/>
+          </a:xfrm>
+          <a:prstGeom prst="rect">
+            <a:avLst/>
+          </a:prstGeom>
+          <a:solidFill>
+            <a:srgbClr val="F7F9FB"/>
+          </a:solidFill>
+          <a:ln>
+            <a:solidFill>
+              <a:srgbClr val="D6DCE4"/>
+            </a:solidFill>
+          </a:ln>
+          <a:effectLst/>
+        </p:spPr>
+        <p:style>
+          <a:lnRef idx="1">
+            <a:schemeClr val="accent1"/>
+          </a:lnRef>
+          <a:fillRef idx="3">
+            <a:schemeClr val="accent1"/>
+          </a:fillRef>
+          <a:effectRef idx="2">
+            <a:schemeClr val="accent1"/>
+          </a:effectRef>
+          <a:fontRef idx="minor">
+            <a:schemeClr val="lt1"/>
+          </a:fontRef>
+        </p:style>
+        <p:txBody>
+          <a:bodyPr rtlCol="0" anchor="ctr" wrap="square"/>
+          <a:lstStyle/>
+          <a:p>
+            <a:pPr algn="ctr"/>
+          </a:p>
+        </p:txBody>
+      </p:sp>
+      <p:sp>
+        <p:nvSpPr>
+          <p:cNvPr id="24" name="TextBox 23"/>
+          <p:cNvSpPr txBox="1"/>
+          <p:nvPr/>
+        </p:nvSpPr>
+        <p:spPr>
+          <a:xfrm>
+            <a:off x="6400800" y="3913632"/>
+            <a:ext cx="5340096" cy="237744"/>
+          </a:xfrm>
+          <a:prstGeom prst="rect">
+            <a:avLst/>
+          </a:prstGeom>
+          <a:noFill/>
+        </p:spPr>
+        <p:txBody>
+          <a:bodyPr wrap="square">
+            <a:spAutoFit/>
+          </a:bodyPr>
+          <a:lstStyle/>
+          <a:p>
+            <a:r>
+              <a:rPr sz="950" b="1">
+                <a:solidFill>
+                  <a:srgbClr val="010328"/>
+                </a:solidFill>
+                <a:latin typeface="微软雅黑"/>
+              </a:rPr>
+              <a:t>④ 采集口径（可复现）</a:t>
+            </a:r>
+          </a:p>
+        </p:txBody>
+      </p:sp>
+      <p:sp>
+        <p:nvSpPr>
+          <p:cNvPr id="25" name="TextBox 24"/>
+          <p:cNvSpPr txBox="1"/>
+          <p:nvPr/>
+        </p:nvSpPr>
+        <p:spPr>
+          <a:xfrm>
+            <a:off x="6437376" y="4187952"/>
+            <a:ext cx="5266944" cy="1920240"/>
+          </a:xfrm>
+          <a:prstGeom prst="rect">
+            <a:avLst/>
+          </a:prstGeom>
+          <a:noFill/>
+        </p:spPr>
+        <p:txBody>
+          <a:bodyPr wrap="square">
+            <a:spAutoFit/>
+          </a:bodyPr>
+          <a:lstStyle/>
+          <a:p>
+            <a:r>
+              <a:rPr sz="950" b="0">
+                <a:solidFill>
+                  <a:srgbClr val="2B2F36"/>
+                </a:solidFill>
+                <a:latin typeface="微软雅黑"/>
+              </a:rPr>
+              <a:t>项目：05-AI应用基础48课时版/工程化项目/m42_rag/</a:t>
+            </a:r>
+          </a:p>
+          <a:p>
+            <a:r>
+              <a:rPr sz="950" b="0">
+                <a:solidFill>
+                  <a:srgbClr val="2B2F36"/>
+                </a:solidFill>
+                <a:latin typeface="微软雅黑"/>
+              </a:rPr>
+              <a:t>命令：/opt/anaconda3/bin/python run.py ｜ /opt/anaconda3/bin/python -m pytest -q</a:t>
+            </a:r>
+          </a:p>
+          <a:p>
+            <a:r>
+              <a:rPr sz="950" b="0">
+                <a:solidFill>
+                  <a:srgbClr val="2B2F36"/>
+                </a:solidFill>
+                <a:latin typeface="微软雅黑"/>
+              </a:rPr>
+              <a:t>采集：工具/ppt97/capture97.py（2026-10-28 10:49 真跑逐字捕获输出）</a:t>
+            </a:r>
+          </a:p>
+          <a:p>
+            <a:r>
+              <a:rPr sz="950" b="0">
+                <a:solidFill>
+                  <a:srgbClr val="2B2F36"/>
+                </a:solidFill>
+                <a:latin typeface="微软雅黑"/>
+              </a:rPr>
+              <a:t>渲染：工具/ppt97/terminal_png.py（终端截图，不改写任何数字）</a:t>
+            </a:r>
+          </a:p>
+          <a:p>
+            <a:r>
+              <a:rPr sz="950" b="0">
+                <a:solidFill>
+                  <a:srgbClr val="2B2F36"/>
+                </a:solidFill>
+                <a:latin typeface="微软雅黑"/>
+              </a:rPr>
+              <a:t>退出码：run=0 ｜ pytest=0</a:t>
+            </a:r>
+          </a:p>
+          <a:p>
+            <a:r>
+              <a:rPr sz="950" b="0">
+                <a:solidFill>
+                  <a:srgbClr val="2B2F36"/>
+                </a:solidFill>
+                <a:latin typeface="微软雅黑"/>
+              </a:rPr>
+              <a:t>档位判定取自 output/report.txt「验收档位判定（实测）」段</a:t>
+            </a:r>
+          </a:p>
+        </p:txBody>
+      </p:sp>
+      <p:sp>
+        <p:nvSpPr>
+          <p:cNvPr id="26" name="TextBox 25"/>
+          <p:cNvSpPr txBox="1"/>
+          <p:nvPr/>
+        </p:nvSpPr>
+        <p:spPr>
+          <a:xfrm>
+            <a:off x="457200" y="6254496"/>
+            <a:ext cx="11247120" cy="201168"/>
+          </a:xfrm>
+          <a:prstGeom prst="rect">
+            <a:avLst/>
+          </a:prstGeom>
+          <a:noFill/>
+        </p:spPr>
+        <p:txBody>
+          <a:bodyPr wrap="square">
+            <a:spAutoFit/>
+          </a:bodyPr>
+          <a:lstStyle/>
+          <a:p>
+            <a:r>
+              <a:rPr sz="900" b="0">
+                <a:solidFill>
+                  <a:srgbClr val="7A8698"/>
+                </a:solidFill>
+                <a:latin typeface="微软雅黑"/>
+              </a:rPr>
+              <a:t>截图内容逐字取自 工具/ppt97/evidence/m42_rag/（capture97.py 真跑捕获，未改写数字）</a:t>
+            </a:r>
+          </a:p>
+        </p:txBody>
+      </p:sp>
+    </p:spTree>
+  </p:cSld>
+  <p:clrMapOvr>
+    <a:masterClrMapping/>
+  </p:clrMapOvr>
+</p:sld>
+</file>
+
 <file path=ppt/slides/slide7.xml><?xml version="1.0" encoding="utf-8"?>
 <p:sld xmlns:a="http://schemas.openxmlformats.org/drawingml/2006/main" xmlns:p="http://schemas.openxmlformats.org/presentationml/2006/main" xmlns:r="http://schemas.openxmlformats.org/officeDocument/2006/relationships">
   <p:cSld>
@@ -60530,7 +62657,7 @@
                 </a:solidFill>
                 <a:latin typeface="微软雅黑"/>
               </a:rPr>
-              <a:t>7 / 64</a:t>
+              <a:t>7 / 66</a:t>
             </a:r>
           </a:p>
         </p:txBody>
@@ -61502,7 +63629,7 @@
                 </a:solidFill>
                 <a:latin typeface="微软雅黑"/>
               </a:rPr>
-              <a:t>8 / 64</a:t>
+              <a:t>8 / 66</a:t>
             </a:r>
           </a:p>
         </p:txBody>
@@ -62357,7 +64484,7 @@
                 </a:solidFill>
                 <a:latin typeface="微软雅黑"/>
               </a:rPr>
-              <a:t>9 / 64</a:t>
+              <a:t>9 / 66</a:t>
             </a:r>
           </a:p>
         </p:txBody>
